--- a/docs/NARA-AI-과제기획서.pptx
+++ b/docs/NARA-AI-과제기획서.pptx
@@ -13,9 +13,12 @@
     <p:sldId id="261" r:id="rId7"/>
     <p:sldId id="262" r:id="rId8"/>
     <p:sldId id="263" r:id="rId9"/>
+    <p:sldId id="264" r:id="rId10"/>
+    <p:sldId id="265" r:id="rId11"/>
+    <p:sldId id="266" r:id="rId12"/>
   </p:sldIdLst>
   <p:notesMasterIdLst>
-    <p:notesMasterId r:id="rId10"/>
+    <p:notesMasterId r:id="rId13"/>
   </p:notesMasterIdLst>
   <p:sldSz cx="9144000" cy="5143500"/>
   <p:notesSz cx="5143500" cy="9144000"/>
@@ -551,6 +554,182 @@
 </p:notes>
 </file>
 
+<file path=ppt/notesSlides/notesSlide10.xml><?xml version="1.0" encoding="utf-8"?>
+<p:notes xmlns:a="http://schemas.openxmlformats.org/drawingml/2006/main" xmlns:r="http://schemas.openxmlformats.org/officeDocument/2006/relationships" xmlns:p="http://schemas.openxmlformats.org/presentationml/2006/main">
+  <p:cSld>
+    <p:spTree>
+      <p:nvGrpSpPr>
+        <p:cNvPr id="1" name=""/>
+        <p:cNvGrpSpPr/>
+        <p:nvPr/>
+      </p:nvGrpSpPr>
+      <p:grpSpPr>
+        <a:xfrm>
+          <a:off x="0" y="0"/>
+          <a:ext cx="0" cy="0"/>
+          <a:chOff x="0" y="0"/>
+          <a:chExt cx="0" cy="0"/>
+        </a:xfrm>
+      </p:grpSpPr>
+      <p:sp>
+        <p:nvSpPr>
+          <p:cNvPr id="2" name="Slide Image Placeholder 1"/>
+          <p:cNvSpPr>
+            <a:spLocks noGrp="1" noRot="1" noChangeAspect="1"/>
+          </p:cNvSpPr>
+          <p:nvPr>
+            <p:ph type="sldImg"/>
+          </p:nvPr>
+        </p:nvSpPr>
+        <p:spPr/>
+      </p:sp>
+      <p:sp>
+        <p:nvSpPr>
+          <p:cNvPr id="3" name="Notes Placeholder 2"/>
+          <p:cNvSpPr>
+            <a:spLocks noGrp="1"/>
+          </p:cNvSpPr>
+          <p:nvPr>
+            <p:ph type="body" idx="1"/>
+          </p:nvPr>
+        </p:nvSpPr>
+        <p:spPr/>
+        <p:txBody>
+          <a:bodyPr/>
+          <a:lstStyle/>
+          <a:p>
+            <a:r>
+              <a:rPr lang="en-US" dirty="0"/>
+              <a:t/>
+            </a:r>
+            <a:endParaRPr lang="en-US" dirty="0"/>
+          </a:p>
+        </p:txBody>
+      </p:sp>
+      <p:sp>
+        <p:nvSpPr>
+          <p:cNvPr id="4" name="Slide Number Placeholder 3"/>
+          <p:cNvSpPr>
+            <a:spLocks noGrp="1"/>
+          </p:cNvSpPr>
+          <p:nvPr>
+            <p:ph type="sldNum" sz="quarter" idx="10"/>
+          </p:nvPr>
+        </p:nvSpPr>
+        <p:spPr/>
+        <p:txBody>
+          <a:bodyPr/>
+          <a:lstStyle/>
+          <a:p>
+            <a:fld id="{F7021451-1387-4CA6-816F-3879F97B5CBC}" type="slidenum">
+              <a:rPr lang="en-US"/>
+              <a:t>10</a:t>
+            </a:fld>
+            <a:endParaRPr lang="en-US"/>
+          </a:p>
+        </p:txBody>
+      </p:sp>
+    </p:spTree>
+    <p:extLst>
+      <p:ext uri="{BB962C8B-B14F-4D97-AF65-F5344CB8AC3E}">
+        <p14:creationId xmlns:p14="http://schemas.microsoft.com/office/powerpoint/2010/main" val="1024086991"/>
+      </p:ext>
+    </p:extLst>
+  </p:cSld>
+  <p:clrMapOvr>
+    <a:masterClrMapping/>
+  </p:clrMapOvr>
+</p:notes>
+</file>
+
+<file path=ppt/notesSlides/notesSlide11.xml><?xml version="1.0" encoding="utf-8"?>
+<p:notes xmlns:a="http://schemas.openxmlformats.org/drawingml/2006/main" xmlns:r="http://schemas.openxmlformats.org/officeDocument/2006/relationships" xmlns:p="http://schemas.openxmlformats.org/presentationml/2006/main">
+  <p:cSld>
+    <p:spTree>
+      <p:nvGrpSpPr>
+        <p:cNvPr id="1" name=""/>
+        <p:cNvGrpSpPr/>
+        <p:nvPr/>
+      </p:nvGrpSpPr>
+      <p:grpSpPr>
+        <a:xfrm>
+          <a:off x="0" y="0"/>
+          <a:ext cx="0" cy="0"/>
+          <a:chOff x="0" y="0"/>
+          <a:chExt cx="0" cy="0"/>
+        </a:xfrm>
+      </p:grpSpPr>
+      <p:sp>
+        <p:nvSpPr>
+          <p:cNvPr id="2" name="Slide Image Placeholder 1"/>
+          <p:cNvSpPr>
+            <a:spLocks noGrp="1" noRot="1" noChangeAspect="1"/>
+          </p:cNvSpPr>
+          <p:nvPr>
+            <p:ph type="sldImg"/>
+          </p:nvPr>
+        </p:nvSpPr>
+        <p:spPr/>
+      </p:sp>
+      <p:sp>
+        <p:nvSpPr>
+          <p:cNvPr id="3" name="Notes Placeholder 2"/>
+          <p:cNvSpPr>
+            <a:spLocks noGrp="1"/>
+          </p:cNvSpPr>
+          <p:nvPr>
+            <p:ph type="body" idx="1"/>
+          </p:nvPr>
+        </p:nvSpPr>
+        <p:spPr/>
+        <p:txBody>
+          <a:bodyPr/>
+          <a:lstStyle/>
+          <a:p>
+            <a:r>
+              <a:rPr lang="en-US" dirty="0"/>
+              <a:t/>
+            </a:r>
+            <a:endParaRPr lang="en-US" dirty="0"/>
+          </a:p>
+        </p:txBody>
+      </p:sp>
+      <p:sp>
+        <p:nvSpPr>
+          <p:cNvPr id="4" name="Slide Number Placeholder 3"/>
+          <p:cNvSpPr>
+            <a:spLocks noGrp="1"/>
+          </p:cNvSpPr>
+          <p:nvPr>
+            <p:ph type="sldNum" sz="quarter" idx="10"/>
+          </p:nvPr>
+        </p:nvSpPr>
+        <p:spPr/>
+        <p:txBody>
+          <a:bodyPr/>
+          <a:lstStyle/>
+          <a:p>
+            <a:fld id="{F7021451-1387-4CA6-816F-3879F97B5CBC}" type="slidenum">
+              <a:rPr lang="en-US"/>
+              <a:t>11</a:t>
+            </a:fld>
+            <a:endParaRPr lang="en-US"/>
+          </a:p>
+        </p:txBody>
+      </p:sp>
+    </p:spTree>
+    <p:extLst>
+      <p:ext uri="{BB962C8B-B14F-4D97-AF65-F5344CB8AC3E}">
+        <p14:creationId xmlns:p14="http://schemas.microsoft.com/office/powerpoint/2010/main" val="1024086991"/>
+      </p:ext>
+    </p:extLst>
+  </p:cSld>
+  <p:clrMapOvr>
+    <a:masterClrMapping/>
+  </p:clrMapOvr>
+</p:notes>
+</file>
+
 <file path=ppt/notesSlides/notesSlide2.xml><?xml version="1.0" encoding="utf-8"?>
 <p:notes xmlns:a="http://schemas.openxmlformats.org/drawingml/2006/main" xmlns:r="http://schemas.openxmlformats.org/officeDocument/2006/relationships" xmlns:p="http://schemas.openxmlformats.org/presentationml/2006/main">
   <p:cSld>
@@ -1149,6 +1328,94 @@
             <a:fld id="{F7021451-1387-4CA6-816F-3879F97B5CBC}" type="slidenum">
               <a:rPr lang="en-US"/>
               <a:t>8</a:t>
+            </a:fld>
+            <a:endParaRPr lang="en-US"/>
+          </a:p>
+        </p:txBody>
+      </p:sp>
+    </p:spTree>
+    <p:extLst>
+      <p:ext uri="{BB962C8B-B14F-4D97-AF65-F5344CB8AC3E}">
+        <p14:creationId xmlns:p14="http://schemas.microsoft.com/office/powerpoint/2010/main" val="1024086991"/>
+      </p:ext>
+    </p:extLst>
+  </p:cSld>
+  <p:clrMapOvr>
+    <a:masterClrMapping/>
+  </p:clrMapOvr>
+</p:notes>
+</file>
+
+<file path=ppt/notesSlides/notesSlide9.xml><?xml version="1.0" encoding="utf-8"?>
+<p:notes xmlns:a="http://schemas.openxmlformats.org/drawingml/2006/main" xmlns:r="http://schemas.openxmlformats.org/officeDocument/2006/relationships" xmlns:p="http://schemas.openxmlformats.org/presentationml/2006/main">
+  <p:cSld>
+    <p:spTree>
+      <p:nvGrpSpPr>
+        <p:cNvPr id="1" name=""/>
+        <p:cNvGrpSpPr/>
+        <p:nvPr/>
+      </p:nvGrpSpPr>
+      <p:grpSpPr>
+        <a:xfrm>
+          <a:off x="0" y="0"/>
+          <a:ext cx="0" cy="0"/>
+          <a:chOff x="0" y="0"/>
+          <a:chExt cx="0" cy="0"/>
+        </a:xfrm>
+      </p:grpSpPr>
+      <p:sp>
+        <p:nvSpPr>
+          <p:cNvPr id="2" name="Slide Image Placeholder 1"/>
+          <p:cNvSpPr>
+            <a:spLocks noGrp="1" noRot="1" noChangeAspect="1"/>
+          </p:cNvSpPr>
+          <p:nvPr>
+            <p:ph type="sldImg"/>
+          </p:nvPr>
+        </p:nvSpPr>
+        <p:spPr/>
+      </p:sp>
+      <p:sp>
+        <p:nvSpPr>
+          <p:cNvPr id="3" name="Notes Placeholder 2"/>
+          <p:cNvSpPr>
+            <a:spLocks noGrp="1"/>
+          </p:cNvSpPr>
+          <p:nvPr>
+            <p:ph type="body" idx="1"/>
+          </p:nvPr>
+        </p:nvSpPr>
+        <p:spPr/>
+        <p:txBody>
+          <a:bodyPr/>
+          <a:lstStyle/>
+          <a:p>
+            <a:r>
+              <a:rPr lang="en-US" dirty="0"/>
+              <a:t/>
+            </a:r>
+            <a:endParaRPr lang="en-US" dirty="0"/>
+          </a:p>
+        </p:txBody>
+      </p:sp>
+      <p:sp>
+        <p:nvSpPr>
+          <p:cNvPr id="4" name="Slide Number Placeholder 3"/>
+          <p:cNvSpPr>
+            <a:spLocks noGrp="1"/>
+          </p:cNvSpPr>
+          <p:nvPr>
+            <p:ph type="sldNum" sz="quarter" idx="10"/>
+          </p:nvPr>
+        </p:nvSpPr>
+        <p:spPr/>
+        <p:txBody>
+          <a:bodyPr/>
+          <a:lstStyle/>
+          <a:p>
+            <a:fld id="{F7021451-1387-4CA6-816F-3879F97B5CBC}" type="slidenum">
+              <a:rPr lang="en-US"/>
+              <a:t>9</a:t>
             </a:fld>
             <a:endParaRPr lang="en-US"/>
           </a:p>
@@ -1699,6 +1966,2533 @@
 </p:sld>
 </file>
 
+<file path=ppt/slides/slide10.xml><?xml version="1.0" encoding="utf-8"?>
+<p:sld xmlns:a="http://schemas.openxmlformats.org/drawingml/2006/main" xmlns:r="http://schemas.openxmlformats.org/officeDocument/2006/relationships" xmlns:p="http://schemas.openxmlformats.org/presentationml/2006/main">
+  <p:cSld name="Slide 10">
+    <p:bg>
+      <p:bgPr>
+        <a:solidFill>
+          <a:srgbClr val="FFFFFF"/>
+        </a:solidFill>
+      </p:bgPr>
+    </p:bg>
+    <p:spTree>
+      <p:nvGrpSpPr>
+        <p:cNvPr id="1" name=""/>
+        <p:cNvGrpSpPr/>
+        <p:nvPr/>
+      </p:nvGrpSpPr>
+      <p:grpSpPr>
+        <a:xfrm>
+          <a:off x="0" y="0"/>
+          <a:ext cx="0" cy="0"/>
+          <a:chOff x="0" y="0"/>
+          <a:chExt cx="0" cy="0"/>
+        </a:xfrm>
+      </p:grpSpPr>
+      <p:sp>
+        <p:nvSpPr>
+          <p:cNvPr id="2" name="Text 0"/>
+          <p:cNvSpPr/>
+          <p:nvPr/>
+        </p:nvSpPr>
+        <p:spPr>
+          <a:xfrm>
+            <a:off x="731520" y="274320"/>
+            <a:ext cx="7680960" cy="640080"/>
+          </a:xfrm>
+          <a:prstGeom prst="rect">
+            <a:avLst/>
+          </a:prstGeom>
+          <a:noFill/>
+          <a:ln/>
+        </p:spPr>
+        <p:txBody>
+          <a:bodyPr wrap="square" rtlCol="0" anchor="ctr"/>
+          <a:lstStyle/>
+          <a:p>
+            <a:pPr indent="0" marL="0">
+              <a:buNone/>
+            </a:pPr>
+            <a:r>
+              <a:rPr lang="en-US" sz="3200" dirty="0">
+                <a:solidFill>
+                  <a:srgbClr val="1A1A2E"/>
+                </a:solidFill>
+                <a:latin typeface="Arial Black" pitchFamily="34" charset="0"/>
+                <a:ea typeface="Arial Black" pitchFamily="34" charset="-122"/>
+                <a:cs typeface="Arial Black" pitchFamily="34" charset="-120"/>
+              </a:rPr>
+              <a:t>하드웨어 자동 적응 (12종 GPU + 4종 CPU)</a:t>
+            </a:r>
+            <a:endParaRPr lang="en-US" sz="3200" dirty="0"/>
+          </a:p>
+        </p:txBody>
+      </p:sp>
+      <p:sp>
+        <p:nvSpPr>
+          <p:cNvPr id="3" name="Text 1"/>
+          <p:cNvSpPr/>
+          <p:nvPr/>
+        </p:nvSpPr>
+        <p:spPr>
+          <a:xfrm>
+            <a:off x="731520" y="1097280"/>
+            <a:ext cx="1828800" cy="411480"/>
+          </a:xfrm>
+          <a:prstGeom prst="rect">
+            <a:avLst/>
+          </a:prstGeom>
+          <a:solidFill>
+            <a:srgbClr val="1A1A2E"/>
+          </a:solidFill>
+          <a:ln/>
+        </p:spPr>
+        <p:txBody>
+          <a:bodyPr wrap="square" lIns="0" tIns="0" rIns="0" bIns="0" rtlCol="0" anchor="ctr"/>
+          <a:lstStyle/>
+          <a:p>
+            <a:pPr algn="ctr" indent="0" marL="0">
+              <a:buNone/>
+            </a:pPr>
+            <a:r>
+              <a:rPr lang="en-US" sz="1200" b="1" dirty="0">
+                <a:solidFill>
+                  <a:srgbClr val="FFFFFF"/>
+                </a:solidFill>
+                <a:latin typeface="Calibri" pitchFamily="34" charset="0"/>
+                <a:ea typeface="Calibri" pitchFamily="34" charset="-122"/>
+                <a:cs typeface="Calibri" pitchFamily="34" charset="-120"/>
+              </a:rPr>
+              <a:t>하드웨어</a:t>
+            </a:r>
+            <a:endParaRPr lang="en-US" sz="1200" dirty="0"/>
+          </a:p>
+        </p:txBody>
+      </p:sp>
+      <p:sp>
+        <p:nvSpPr>
+          <p:cNvPr id="4" name="Text 2"/>
+          <p:cNvSpPr/>
+          <p:nvPr/>
+        </p:nvSpPr>
+        <p:spPr>
+          <a:xfrm>
+            <a:off x="2743200" y="1097280"/>
+            <a:ext cx="1463040" cy="411480"/>
+          </a:xfrm>
+          <a:prstGeom prst="rect">
+            <a:avLst/>
+          </a:prstGeom>
+          <a:solidFill>
+            <a:srgbClr val="1A1A2E"/>
+          </a:solidFill>
+          <a:ln/>
+        </p:spPr>
+        <p:txBody>
+          <a:bodyPr wrap="square" lIns="0" tIns="0" rIns="0" bIns="0" rtlCol="0" anchor="ctr"/>
+          <a:lstStyle/>
+          <a:p>
+            <a:pPr algn="ctr" indent="0" marL="0">
+              <a:buNone/>
+            </a:pPr>
+            <a:r>
+              <a:rPr lang="en-US" sz="1200" b="1" dirty="0">
+                <a:solidFill>
+                  <a:srgbClr val="FFFFFF"/>
+                </a:solidFill>
+                <a:latin typeface="Calibri" pitchFamily="34" charset="0"/>
+                <a:ea typeface="Calibri" pitchFamily="34" charset="-122"/>
+                <a:cs typeface="Calibri" pitchFamily="34" charset="-120"/>
+              </a:rPr>
+              <a:t>등급</a:t>
+            </a:r>
+            <a:endParaRPr lang="en-US" sz="1200" dirty="0"/>
+          </a:p>
+        </p:txBody>
+      </p:sp>
+      <p:sp>
+        <p:nvSpPr>
+          <p:cNvPr id="5" name="Text 3"/>
+          <p:cNvSpPr/>
+          <p:nvPr/>
+        </p:nvSpPr>
+        <p:spPr>
+          <a:xfrm>
+            <a:off x="4389120" y="1097280"/>
+            <a:ext cx="1097280" cy="411480"/>
+          </a:xfrm>
+          <a:prstGeom prst="rect">
+            <a:avLst/>
+          </a:prstGeom>
+          <a:solidFill>
+            <a:srgbClr val="1A1A2E"/>
+          </a:solidFill>
+          <a:ln/>
+        </p:spPr>
+        <p:txBody>
+          <a:bodyPr wrap="square" lIns="0" tIns="0" rIns="0" bIns="0" rtlCol="0" anchor="ctr"/>
+          <a:lstStyle/>
+          <a:p>
+            <a:pPr algn="ctr" indent="0" marL="0">
+              <a:buNone/>
+            </a:pPr>
+            <a:r>
+              <a:rPr lang="en-US" sz="1200" b="1" dirty="0">
+                <a:solidFill>
+                  <a:srgbClr val="FFFFFF"/>
+                </a:solidFill>
+                <a:latin typeface="Calibri" pitchFamily="34" charset="0"/>
+                <a:ea typeface="Calibri" pitchFamily="34" charset="-122"/>
+                <a:cs typeface="Calibri" pitchFamily="34" charset="-120"/>
+              </a:rPr>
+              <a:t>모델</a:t>
+            </a:r>
+            <a:endParaRPr lang="en-US" sz="1200" dirty="0"/>
+          </a:p>
+        </p:txBody>
+      </p:sp>
+      <p:sp>
+        <p:nvSpPr>
+          <p:cNvPr id="6" name="Text 4"/>
+          <p:cNvSpPr/>
+          <p:nvPr/>
+        </p:nvSpPr>
+        <p:spPr>
+          <a:xfrm>
+            <a:off x="5669280" y="1097280"/>
+            <a:ext cx="1097280" cy="411480"/>
+          </a:xfrm>
+          <a:prstGeom prst="rect">
+            <a:avLst/>
+          </a:prstGeom>
+          <a:solidFill>
+            <a:srgbClr val="1A1A2E"/>
+          </a:solidFill>
+          <a:ln/>
+        </p:spPr>
+        <p:txBody>
+          <a:bodyPr wrap="square" lIns="0" tIns="0" rIns="0" bIns="0" rtlCol="0" anchor="ctr"/>
+          <a:lstStyle/>
+          <a:p>
+            <a:pPr algn="ctr" indent="0" marL="0">
+              <a:buNone/>
+            </a:pPr>
+            <a:r>
+              <a:rPr lang="en-US" sz="1200" b="1" dirty="0">
+                <a:solidFill>
+                  <a:srgbClr val="FFFFFF"/>
+                </a:solidFill>
+                <a:latin typeface="Calibri" pitchFamily="34" charset="0"/>
+                <a:ea typeface="Calibri" pitchFamily="34" charset="-122"/>
+                <a:cs typeface="Calibri" pitchFamily="34" charset="-120"/>
+              </a:rPr>
+              <a:t>양자화</a:t>
+            </a:r>
+            <a:endParaRPr lang="en-US" sz="1200" dirty="0"/>
+          </a:p>
+        </p:txBody>
+      </p:sp>
+      <p:sp>
+        <p:nvSpPr>
+          <p:cNvPr id="7" name="Text 5"/>
+          <p:cNvSpPr/>
+          <p:nvPr/>
+        </p:nvSpPr>
+        <p:spPr>
+          <a:xfrm>
+            <a:off x="6858000" y="1097280"/>
+            <a:ext cx="1097280" cy="411480"/>
+          </a:xfrm>
+          <a:prstGeom prst="rect">
+            <a:avLst/>
+          </a:prstGeom>
+          <a:solidFill>
+            <a:srgbClr val="1A1A2E"/>
+          </a:solidFill>
+          <a:ln/>
+        </p:spPr>
+        <p:txBody>
+          <a:bodyPr wrap="square" lIns="0" tIns="0" rIns="0" bIns="0" rtlCol="0" anchor="ctr"/>
+          <a:lstStyle/>
+          <a:p>
+            <a:pPr algn="ctr" indent="0" marL="0">
+              <a:buNone/>
+            </a:pPr>
+            <a:r>
+              <a:rPr lang="en-US" sz="1200" b="1" dirty="0">
+                <a:solidFill>
+                  <a:srgbClr val="FFFFFF"/>
+                </a:solidFill>
+                <a:latin typeface="Calibri" pitchFamily="34" charset="0"/>
+                <a:ea typeface="Calibri" pitchFamily="34" charset="-122"/>
+                <a:cs typeface="Calibri" pitchFamily="34" charset="-120"/>
+              </a:rPr>
+              <a:t>TP</a:t>
+            </a:r>
+            <a:endParaRPr lang="en-US" sz="1200" dirty="0"/>
+          </a:p>
+        </p:txBody>
+      </p:sp>
+      <p:sp>
+        <p:nvSpPr>
+          <p:cNvPr id="8" name="Text 6"/>
+          <p:cNvSpPr/>
+          <p:nvPr/>
+        </p:nvSpPr>
+        <p:spPr>
+          <a:xfrm>
+            <a:off x="731520" y="1508760"/>
+            <a:ext cx="1828800" cy="438912"/>
+          </a:xfrm>
+          <a:prstGeom prst="rect">
+            <a:avLst/>
+          </a:prstGeom>
+          <a:solidFill>
+            <a:srgbClr val="F5F7FA"/>
+          </a:solidFill>
+          <a:ln/>
+        </p:spPr>
+        <p:txBody>
+          <a:bodyPr wrap="square" lIns="0" tIns="0" rIns="0" bIns="0" rtlCol="0" anchor="ctr"/>
+          <a:lstStyle/>
+          <a:p>
+            <a:pPr algn="ctr" indent="0" marL="0">
+              <a:buNone/>
+            </a:pPr>
+            <a:r>
+              <a:rPr lang="en-US" sz="1200" b="1" dirty="0">
+                <a:solidFill>
+                  <a:srgbClr val="1A1A2E"/>
+                </a:solidFill>
+                <a:latin typeface="Calibri" pitchFamily="34" charset="0"/>
+                <a:ea typeface="Calibri" pitchFamily="34" charset="-122"/>
+                <a:cs typeface="Calibri" pitchFamily="34" charset="-120"/>
+              </a:rPr>
+              <a:t>B200 x16</a:t>
+            </a:r>
+            <a:endParaRPr lang="en-US" sz="1200" dirty="0"/>
+          </a:p>
+        </p:txBody>
+      </p:sp>
+      <p:sp>
+        <p:nvSpPr>
+          <p:cNvPr id="9" name="Text 7"/>
+          <p:cNvSpPr/>
+          <p:nvPr/>
+        </p:nvSpPr>
+        <p:spPr>
+          <a:xfrm>
+            <a:off x="2743200" y="1508760"/>
+            <a:ext cx="1463040" cy="438912"/>
+          </a:xfrm>
+          <a:prstGeom prst="rect">
+            <a:avLst/>
+          </a:prstGeom>
+          <a:solidFill>
+            <a:srgbClr val="F5F7FA"/>
+          </a:solidFill>
+          <a:ln/>
+        </p:spPr>
+        <p:txBody>
+          <a:bodyPr wrap="square" lIns="0" tIns="0" rIns="0" bIns="0" rtlCol="0" anchor="ctr"/>
+          <a:lstStyle/>
+          <a:p>
+            <a:pPr algn="ctr" indent="0" marL="0">
+              <a:buNone/>
+            </a:pPr>
+            <a:r>
+              <a:rPr lang="en-US" sz="1200" dirty="0">
+                <a:solidFill>
+                  <a:srgbClr val="1A1A2E"/>
+                </a:solidFill>
+                <a:latin typeface="Calibri" pitchFamily="34" charset="0"/>
+                <a:ea typeface="Calibri" pitchFamily="34" charset="-122"/>
+                <a:cs typeface="Calibri" pitchFamily="34" charset="-120"/>
+              </a:rPr>
+              <a:t>데이터센터</a:t>
+            </a:r>
+            <a:endParaRPr lang="en-US" sz="1200" dirty="0"/>
+          </a:p>
+        </p:txBody>
+      </p:sp>
+      <p:sp>
+        <p:nvSpPr>
+          <p:cNvPr id="10" name="Text 8"/>
+          <p:cNvSpPr/>
+          <p:nvPr/>
+        </p:nvSpPr>
+        <p:spPr>
+          <a:xfrm>
+            <a:off x="4389120" y="1508760"/>
+            <a:ext cx="1097280" cy="438912"/>
+          </a:xfrm>
+          <a:prstGeom prst="rect">
+            <a:avLst/>
+          </a:prstGeom>
+          <a:solidFill>
+            <a:srgbClr val="F5F7FA"/>
+          </a:solidFill>
+          <a:ln/>
+        </p:spPr>
+        <p:txBody>
+          <a:bodyPr wrap="square" lIns="0" tIns="0" rIns="0" bIns="0" rtlCol="0" anchor="ctr"/>
+          <a:lstStyle/>
+          <a:p>
+            <a:pPr algn="ctr" indent="0" marL="0">
+              <a:buNone/>
+            </a:pPr>
+            <a:r>
+              <a:rPr lang="en-US" sz="1200" dirty="0">
+                <a:solidFill>
+                  <a:srgbClr val="1A1A2E"/>
+                </a:solidFill>
+                <a:latin typeface="Calibri" pitchFamily="34" charset="0"/>
+                <a:ea typeface="Calibri" pitchFamily="34" charset="-122"/>
+                <a:cs typeface="Calibri" pitchFamily="34" charset="-120"/>
+              </a:rPr>
+              <a:t>8B</a:t>
+            </a:r>
+            <a:endParaRPr lang="en-US" sz="1200" dirty="0"/>
+          </a:p>
+        </p:txBody>
+      </p:sp>
+      <p:sp>
+        <p:nvSpPr>
+          <p:cNvPr id="11" name="Text 9"/>
+          <p:cNvSpPr/>
+          <p:nvPr/>
+        </p:nvSpPr>
+        <p:spPr>
+          <a:xfrm>
+            <a:off x="5669280" y="1508760"/>
+            <a:ext cx="1097280" cy="438912"/>
+          </a:xfrm>
+          <a:prstGeom prst="rect">
+            <a:avLst/>
+          </a:prstGeom>
+          <a:solidFill>
+            <a:srgbClr val="F5F7FA"/>
+          </a:solidFill>
+          <a:ln/>
+        </p:spPr>
+        <p:txBody>
+          <a:bodyPr wrap="square" lIns="0" tIns="0" rIns="0" bIns="0" rtlCol="0" anchor="ctr"/>
+          <a:lstStyle/>
+          <a:p>
+            <a:pPr algn="ctr" indent="0" marL="0">
+              <a:buNone/>
+            </a:pPr>
+            <a:r>
+              <a:rPr lang="en-US" sz="1200" dirty="0">
+                <a:solidFill>
+                  <a:srgbClr val="1A1A2E"/>
+                </a:solidFill>
+                <a:latin typeface="Calibri" pitchFamily="34" charset="0"/>
+                <a:ea typeface="Calibri" pitchFamily="34" charset="-122"/>
+                <a:cs typeface="Calibri" pitchFamily="34" charset="-120"/>
+              </a:rPr>
+              <a:t>none</a:t>
+            </a:r>
+            <a:endParaRPr lang="en-US" sz="1200" dirty="0"/>
+          </a:p>
+        </p:txBody>
+      </p:sp>
+      <p:sp>
+        <p:nvSpPr>
+          <p:cNvPr id="12" name="Text 10"/>
+          <p:cNvSpPr/>
+          <p:nvPr/>
+        </p:nvSpPr>
+        <p:spPr>
+          <a:xfrm>
+            <a:off x="6858000" y="1508760"/>
+            <a:ext cx="1097280" cy="438912"/>
+          </a:xfrm>
+          <a:prstGeom prst="rect">
+            <a:avLst/>
+          </a:prstGeom>
+          <a:solidFill>
+            <a:srgbClr val="F5F7FA"/>
+          </a:solidFill>
+          <a:ln/>
+        </p:spPr>
+        <p:txBody>
+          <a:bodyPr wrap="square" lIns="0" tIns="0" rIns="0" bIns="0" rtlCol="0" anchor="ctr"/>
+          <a:lstStyle/>
+          <a:p>
+            <a:pPr algn="ctr" indent="0" marL="0">
+              <a:buNone/>
+            </a:pPr>
+            <a:r>
+              <a:rPr lang="en-US" sz="1200" dirty="0">
+                <a:solidFill>
+                  <a:srgbClr val="1A1A2E"/>
+                </a:solidFill>
+                <a:latin typeface="Calibri" pitchFamily="34" charset="0"/>
+                <a:ea typeface="Calibri" pitchFamily="34" charset="-122"/>
+                <a:cs typeface="Calibri" pitchFamily="34" charset="-120"/>
+              </a:rPr>
+              <a:t>4</a:t>
+            </a:r>
+            <a:endParaRPr lang="en-US" sz="1200" dirty="0"/>
+          </a:p>
+        </p:txBody>
+      </p:sp>
+      <p:sp>
+        <p:nvSpPr>
+          <p:cNvPr id="13" name="Text 11"/>
+          <p:cNvSpPr/>
+          <p:nvPr/>
+        </p:nvSpPr>
+        <p:spPr>
+          <a:xfrm>
+            <a:off x="731520" y="1947672"/>
+            <a:ext cx="1828800" cy="438912"/>
+          </a:xfrm>
+          <a:prstGeom prst="rect">
+            <a:avLst/>
+          </a:prstGeom>
+          <a:solidFill>
+            <a:srgbClr val="FFFFFF"/>
+          </a:solidFill>
+          <a:ln/>
+        </p:spPr>
+        <p:txBody>
+          <a:bodyPr wrap="square" lIns="0" tIns="0" rIns="0" bIns="0" rtlCol="0" anchor="ctr"/>
+          <a:lstStyle/>
+          <a:p>
+            <a:pPr algn="ctr" indent="0" marL="0">
+              <a:buNone/>
+            </a:pPr>
+            <a:r>
+              <a:rPr lang="en-US" sz="1200" b="1" dirty="0">
+                <a:solidFill>
+                  <a:srgbClr val="1A1A2E"/>
+                </a:solidFill>
+                <a:latin typeface="Calibri" pitchFamily="34" charset="0"/>
+                <a:ea typeface="Calibri" pitchFamily="34" charset="-122"/>
+                <a:cs typeface="Calibri" pitchFamily="34" charset="-120"/>
+              </a:rPr>
+              <a:t>H100 x8</a:t>
+            </a:r>
+            <a:endParaRPr lang="en-US" sz="1200" dirty="0"/>
+          </a:p>
+        </p:txBody>
+      </p:sp>
+      <p:sp>
+        <p:nvSpPr>
+          <p:cNvPr id="14" name="Text 12"/>
+          <p:cNvSpPr/>
+          <p:nvPr/>
+        </p:nvSpPr>
+        <p:spPr>
+          <a:xfrm>
+            <a:off x="2743200" y="1947672"/>
+            <a:ext cx="1463040" cy="438912"/>
+          </a:xfrm>
+          <a:prstGeom prst="rect">
+            <a:avLst/>
+          </a:prstGeom>
+          <a:solidFill>
+            <a:srgbClr val="FFFFFF"/>
+          </a:solidFill>
+          <a:ln/>
+        </p:spPr>
+        <p:txBody>
+          <a:bodyPr wrap="square" lIns="0" tIns="0" rIns="0" bIns="0" rtlCol="0" anchor="ctr"/>
+          <a:lstStyle/>
+          <a:p>
+            <a:pPr algn="ctr" indent="0" marL="0">
+              <a:buNone/>
+            </a:pPr>
+            <a:r>
+              <a:rPr lang="en-US" sz="1200" dirty="0">
+                <a:solidFill>
+                  <a:srgbClr val="1A1A2E"/>
+                </a:solidFill>
+                <a:latin typeface="Calibri" pitchFamily="34" charset="0"/>
+                <a:ea typeface="Calibri" pitchFamily="34" charset="-122"/>
+                <a:cs typeface="Calibri" pitchFamily="34" charset="-120"/>
+              </a:rPr>
+              <a:t>데이터센터</a:t>
+            </a:r>
+            <a:endParaRPr lang="en-US" sz="1200" dirty="0"/>
+          </a:p>
+        </p:txBody>
+      </p:sp>
+      <p:sp>
+        <p:nvSpPr>
+          <p:cNvPr id="15" name="Text 13"/>
+          <p:cNvSpPr/>
+          <p:nvPr/>
+        </p:nvSpPr>
+        <p:spPr>
+          <a:xfrm>
+            <a:off x="4389120" y="1947672"/>
+            <a:ext cx="1097280" cy="438912"/>
+          </a:xfrm>
+          <a:prstGeom prst="rect">
+            <a:avLst/>
+          </a:prstGeom>
+          <a:solidFill>
+            <a:srgbClr val="FFFFFF"/>
+          </a:solidFill>
+          <a:ln/>
+        </p:spPr>
+        <p:txBody>
+          <a:bodyPr wrap="square" lIns="0" tIns="0" rIns="0" bIns="0" rtlCol="0" anchor="ctr"/>
+          <a:lstStyle/>
+          <a:p>
+            <a:pPr algn="ctr" indent="0" marL="0">
+              <a:buNone/>
+            </a:pPr>
+            <a:r>
+              <a:rPr lang="en-US" sz="1200" dirty="0">
+                <a:solidFill>
+                  <a:srgbClr val="1A1A2E"/>
+                </a:solidFill>
+                <a:latin typeface="Calibri" pitchFamily="34" charset="0"/>
+                <a:ea typeface="Calibri" pitchFamily="34" charset="-122"/>
+                <a:cs typeface="Calibri" pitchFamily="34" charset="-120"/>
+              </a:rPr>
+              <a:t>8B</a:t>
+            </a:r>
+            <a:endParaRPr lang="en-US" sz="1200" dirty="0"/>
+          </a:p>
+        </p:txBody>
+      </p:sp>
+      <p:sp>
+        <p:nvSpPr>
+          <p:cNvPr id="16" name="Text 14"/>
+          <p:cNvSpPr/>
+          <p:nvPr/>
+        </p:nvSpPr>
+        <p:spPr>
+          <a:xfrm>
+            <a:off x="5669280" y="1947672"/>
+            <a:ext cx="1097280" cy="438912"/>
+          </a:xfrm>
+          <a:prstGeom prst="rect">
+            <a:avLst/>
+          </a:prstGeom>
+          <a:solidFill>
+            <a:srgbClr val="FFFFFF"/>
+          </a:solidFill>
+          <a:ln/>
+        </p:spPr>
+        <p:txBody>
+          <a:bodyPr wrap="square" lIns="0" tIns="0" rIns="0" bIns="0" rtlCol="0" anchor="ctr"/>
+          <a:lstStyle/>
+          <a:p>
+            <a:pPr algn="ctr" indent="0" marL="0">
+              <a:buNone/>
+            </a:pPr>
+            <a:r>
+              <a:rPr lang="en-US" sz="1200" dirty="0">
+                <a:solidFill>
+                  <a:srgbClr val="1A1A2E"/>
+                </a:solidFill>
+                <a:latin typeface="Calibri" pitchFamily="34" charset="0"/>
+                <a:ea typeface="Calibri" pitchFamily="34" charset="-122"/>
+                <a:cs typeface="Calibri" pitchFamily="34" charset="-120"/>
+              </a:rPr>
+              <a:t>none</a:t>
+            </a:r>
+            <a:endParaRPr lang="en-US" sz="1200" dirty="0"/>
+          </a:p>
+        </p:txBody>
+      </p:sp>
+      <p:sp>
+        <p:nvSpPr>
+          <p:cNvPr id="17" name="Text 15"/>
+          <p:cNvSpPr/>
+          <p:nvPr/>
+        </p:nvSpPr>
+        <p:spPr>
+          <a:xfrm>
+            <a:off x="6858000" y="1947672"/>
+            <a:ext cx="1097280" cy="438912"/>
+          </a:xfrm>
+          <a:prstGeom prst="rect">
+            <a:avLst/>
+          </a:prstGeom>
+          <a:solidFill>
+            <a:srgbClr val="FFFFFF"/>
+          </a:solidFill>
+          <a:ln/>
+        </p:spPr>
+        <p:txBody>
+          <a:bodyPr wrap="square" lIns="0" tIns="0" rIns="0" bIns="0" rtlCol="0" anchor="ctr"/>
+          <a:lstStyle/>
+          <a:p>
+            <a:pPr algn="ctr" indent="0" marL="0">
+              <a:buNone/>
+            </a:pPr>
+            <a:r>
+              <a:rPr lang="en-US" sz="1200" dirty="0">
+                <a:solidFill>
+                  <a:srgbClr val="1A1A2E"/>
+                </a:solidFill>
+                <a:latin typeface="Calibri" pitchFamily="34" charset="0"/>
+                <a:ea typeface="Calibri" pitchFamily="34" charset="-122"/>
+                <a:cs typeface="Calibri" pitchFamily="34" charset="-120"/>
+              </a:rPr>
+              <a:t>4</a:t>
+            </a:r>
+            <a:endParaRPr lang="en-US" sz="1200" dirty="0"/>
+          </a:p>
+        </p:txBody>
+      </p:sp>
+      <p:sp>
+        <p:nvSpPr>
+          <p:cNvPr id="18" name="Text 16"/>
+          <p:cNvSpPr/>
+          <p:nvPr/>
+        </p:nvSpPr>
+        <p:spPr>
+          <a:xfrm>
+            <a:off x="731520" y="2386584"/>
+            <a:ext cx="1828800" cy="438912"/>
+          </a:xfrm>
+          <a:prstGeom prst="rect">
+            <a:avLst/>
+          </a:prstGeom>
+          <a:solidFill>
+            <a:srgbClr val="F5F7FA"/>
+          </a:solidFill>
+          <a:ln/>
+        </p:spPr>
+        <p:txBody>
+          <a:bodyPr wrap="square" lIns="0" tIns="0" rIns="0" bIns="0" rtlCol="0" anchor="ctr"/>
+          <a:lstStyle/>
+          <a:p>
+            <a:pPr algn="ctr" indent="0" marL="0">
+              <a:buNone/>
+            </a:pPr>
+            <a:r>
+              <a:rPr lang="en-US" sz="1200" b="1" dirty="0">
+                <a:solidFill>
+                  <a:srgbClr val="1A1A2E"/>
+                </a:solidFill>
+                <a:latin typeface="Calibri" pitchFamily="34" charset="0"/>
+                <a:ea typeface="Calibri" pitchFamily="34" charset="-122"/>
+                <a:cs typeface="Calibri" pitchFamily="34" charset="-120"/>
+              </a:rPr>
+              <a:t>RTX 5090</a:t>
+            </a:r>
+            <a:endParaRPr lang="en-US" sz="1200" dirty="0"/>
+          </a:p>
+        </p:txBody>
+      </p:sp>
+      <p:sp>
+        <p:nvSpPr>
+          <p:cNvPr id="19" name="Text 17"/>
+          <p:cNvSpPr/>
+          <p:nvPr/>
+        </p:nvSpPr>
+        <p:spPr>
+          <a:xfrm>
+            <a:off x="2743200" y="2386584"/>
+            <a:ext cx="1463040" cy="438912"/>
+          </a:xfrm>
+          <a:prstGeom prst="rect">
+            <a:avLst/>
+          </a:prstGeom>
+          <a:solidFill>
+            <a:srgbClr val="F5F7FA"/>
+          </a:solidFill>
+          <a:ln/>
+        </p:spPr>
+        <p:txBody>
+          <a:bodyPr wrap="square" lIns="0" tIns="0" rIns="0" bIns="0" rtlCol="0" anchor="ctr"/>
+          <a:lstStyle/>
+          <a:p>
+            <a:pPr algn="ctr" indent="0" marL="0">
+              <a:buNone/>
+            </a:pPr>
+            <a:r>
+              <a:rPr lang="en-US" sz="1200" dirty="0">
+                <a:solidFill>
+                  <a:srgbClr val="1A1A2E"/>
+                </a:solidFill>
+                <a:latin typeface="Calibri" pitchFamily="34" charset="0"/>
+                <a:ea typeface="Calibri" pitchFamily="34" charset="-122"/>
+                <a:cs typeface="Calibri" pitchFamily="34" charset="-120"/>
+              </a:rPr>
+              <a:t>워크스테이션</a:t>
+            </a:r>
+            <a:endParaRPr lang="en-US" sz="1200" dirty="0"/>
+          </a:p>
+        </p:txBody>
+      </p:sp>
+      <p:sp>
+        <p:nvSpPr>
+          <p:cNvPr id="20" name="Text 18"/>
+          <p:cNvSpPr/>
+          <p:nvPr/>
+        </p:nvSpPr>
+        <p:spPr>
+          <a:xfrm>
+            <a:off x="4389120" y="2386584"/>
+            <a:ext cx="1097280" cy="438912"/>
+          </a:xfrm>
+          <a:prstGeom prst="rect">
+            <a:avLst/>
+          </a:prstGeom>
+          <a:solidFill>
+            <a:srgbClr val="F5F7FA"/>
+          </a:solidFill>
+          <a:ln/>
+        </p:spPr>
+        <p:txBody>
+          <a:bodyPr wrap="square" lIns="0" tIns="0" rIns="0" bIns="0" rtlCol="0" anchor="ctr"/>
+          <a:lstStyle/>
+          <a:p>
+            <a:pPr algn="ctr" indent="0" marL="0">
+              <a:buNone/>
+            </a:pPr>
+            <a:r>
+              <a:rPr lang="en-US" sz="1200" dirty="0">
+                <a:solidFill>
+                  <a:srgbClr val="1A1A2E"/>
+                </a:solidFill>
+                <a:latin typeface="Calibri" pitchFamily="34" charset="0"/>
+                <a:ea typeface="Calibri" pitchFamily="34" charset="-122"/>
+                <a:cs typeface="Calibri" pitchFamily="34" charset="-120"/>
+              </a:rPr>
+              <a:t>8B</a:t>
+            </a:r>
+            <a:endParaRPr lang="en-US" sz="1200" dirty="0"/>
+          </a:p>
+        </p:txBody>
+      </p:sp>
+      <p:sp>
+        <p:nvSpPr>
+          <p:cNvPr id="21" name="Text 19"/>
+          <p:cNvSpPr/>
+          <p:nvPr/>
+        </p:nvSpPr>
+        <p:spPr>
+          <a:xfrm>
+            <a:off x="5669280" y="2386584"/>
+            <a:ext cx="1097280" cy="438912"/>
+          </a:xfrm>
+          <a:prstGeom prst="rect">
+            <a:avLst/>
+          </a:prstGeom>
+          <a:solidFill>
+            <a:srgbClr val="F5F7FA"/>
+          </a:solidFill>
+          <a:ln/>
+        </p:spPr>
+        <p:txBody>
+          <a:bodyPr wrap="square" lIns="0" tIns="0" rIns="0" bIns="0" rtlCol="0" anchor="ctr"/>
+          <a:lstStyle/>
+          <a:p>
+            <a:pPr algn="ctr" indent="0" marL="0">
+              <a:buNone/>
+            </a:pPr>
+            <a:r>
+              <a:rPr lang="en-US" sz="1200" dirty="0">
+                <a:solidFill>
+                  <a:srgbClr val="1A1A2E"/>
+                </a:solidFill>
+                <a:latin typeface="Calibri" pitchFamily="34" charset="0"/>
+                <a:ea typeface="Calibri" pitchFamily="34" charset="-122"/>
+                <a:cs typeface="Calibri" pitchFamily="34" charset="-120"/>
+              </a:rPr>
+              <a:t>none</a:t>
+            </a:r>
+            <a:endParaRPr lang="en-US" sz="1200" dirty="0"/>
+          </a:p>
+        </p:txBody>
+      </p:sp>
+      <p:sp>
+        <p:nvSpPr>
+          <p:cNvPr id="22" name="Text 20"/>
+          <p:cNvSpPr/>
+          <p:nvPr/>
+        </p:nvSpPr>
+        <p:spPr>
+          <a:xfrm>
+            <a:off x="6858000" y="2386584"/>
+            <a:ext cx="1097280" cy="438912"/>
+          </a:xfrm>
+          <a:prstGeom prst="rect">
+            <a:avLst/>
+          </a:prstGeom>
+          <a:solidFill>
+            <a:srgbClr val="F5F7FA"/>
+          </a:solidFill>
+          <a:ln/>
+        </p:spPr>
+        <p:txBody>
+          <a:bodyPr wrap="square" lIns="0" tIns="0" rIns="0" bIns="0" rtlCol="0" anchor="ctr"/>
+          <a:lstStyle/>
+          <a:p>
+            <a:pPr algn="ctr" indent="0" marL="0">
+              <a:buNone/>
+            </a:pPr>
+            <a:r>
+              <a:rPr lang="en-US" sz="1200" dirty="0">
+                <a:solidFill>
+                  <a:srgbClr val="1A1A2E"/>
+                </a:solidFill>
+                <a:latin typeface="Calibri" pitchFamily="34" charset="0"/>
+                <a:ea typeface="Calibri" pitchFamily="34" charset="-122"/>
+                <a:cs typeface="Calibri" pitchFamily="34" charset="-120"/>
+              </a:rPr>
+              <a:t>1-2</a:t>
+            </a:r>
+            <a:endParaRPr lang="en-US" sz="1200" dirty="0"/>
+          </a:p>
+        </p:txBody>
+      </p:sp>
+      <p:sp>
+        <p:nvSpPr>
+          <p:cNvPr id="23" name="Text 21"/>
+          <p:cNvSpPr/>
+          <p:nvPr/>
+        </p:nvSpPr>
+        <p:spPr>
+          <a:xfrm>
+            <a:off x="731520" y="2825496"/>
+            <a:ext cx="1828800" cy="438912"/>
+          </a:xfrm>
+          <a:prstGeom prst="rect">
+            <a:avLst/>
+          </a:prstGeom>
+          <a:solidFill>
+            <a:srgbClr val="FFFFFF"/>
+          </a:solidFill>
+          <a:ln/>
+        </p:spPr>
+        <p:txBody>
+          <a:bodyPr wrap="square" lIns="0" tIns="0" rIns="0" bIns="0" rtlCol="0" anchor="ctr"/>
+          <a:lstStyle/>
+          <a:p>
+            <a:pPr algn="ctr" indent="0" marL="0">
+              <a:buNone/>
+            </a:pPr>
+            <a:r>
+              <a:rPr lang="en-US" sz="1200" b="1" dirty="0">
+                <a:solidFill>
+                  <a:srgbClr val="1A1A2E"/>
+                </a:solidFill>
+                <a:latin typeface="Calibri" pitchFamily="34" charset="0"/>
+                <a:ea typeface="Calibri" pitchFamily="34" charset="-122"/>
+                <a:cs typeface="Calibri" pitchFamily="34" charset="-120"/>
+              </a:rPr>
+              <a:t>RTX 4060 (8GB)</a:t>
+            </a:r>
+            <a:endParaRPr lang="en-US" sz="1200" dirty="0"/>
+          </a:p>
+        </p:txBody>
+      </p:sp>
+      <p:sp>
+        <p:nvSpPr>
+          <p:cNvPr id="24" name="Text 22"/>
+          <p:cNvSpPr/>
+          <p:nvPr/>
+        </p:nvSpPr>
+        <p:spPr>
+          <a:xfrm>
+            <a:off x="2743200" y="2825496"/>
+            <a:ext cx="1463040" cy="438912"/>
+          </a:xfrm>
+          <a:prstGeom prst="rect">
+            <a:avLst/>
+          </a:prstGeom>
+          <a:solidFill>
+            <a:srgbClr val="FFFFFF"/>
+          </a:solidFill>
+          <a:ln/>
+        </p:spPr>
+        <p:txBody>
+          <a:bodyPr wrap="square" lIns="0" tIns="0" rIns="0" bIns="0" rtlCol="0" anchor="ctr"/>
+          <a:lstStyle/>
+          <a:p>
+            <a:pPr algn="ctr" indent="0" marL="0">
+              <a:buNone/>
+            </a:pPr>
+            <a:r>
+              <a:rPr lang="en-US" sz="1200" dirty="0">
+                <a:solidFill>
+                  <a:srgbClr val="1A1A2E"/>
+                </a:solidFill>
+                <a:latin typeface="Calibri" pitchFamily="34" charset="0"/>
+                <a:ea typeface="Calibri" pitchFamily="34" charset="-122"/>
+                <a:cs typeface="Calibri" pitchFamily="34" charset="-120"/>
+              </a:rPr>
+              <a:t>소비자</a:t>
+            </a:r>
+            <a:endParaRPr lang="en-US" sz="1200" dirty="0"/>
+          </a:p>
+        </p:txBody>
+      </p:sp>
+      <p:sp>
+        <p:nvSpPr>
+          <p:cNvPr id="25" name="Text 23"/>
+          <p:cNvSpPr/>
+          <p:nvPr/>
+        </p:nvSpPr>
+        <p:spPr>
+          <a:xfrm>
+            <a:off x="4389120" y="2825496"/>
+            <a:ext cx="1097280" cy="438912"/>
+          </a:xfrm>
+          <a:prstGeom prst="rect">
+            <a:avLst/>
+          </a:prstGeom>
+          <a:solidFill>
+            <a:srgbClr val="FFFFFF"/>
+          </a:solidFill>
+          <a:ln/>
+        </p:spPr>
+        <p:txBody>
+          <a:bodyPr wrap="square" lIns="0" tIns="0" rIns="0" bIns="0" rtlCol="0" anchor="ctr"/>
+          <a:lstStyle/>
+          <a:p>
+            <a:pPr algn="ctr" indent="0" marL="0">
+              <a:buNone/>
+            </a:pPr>
+            <a:r>
+              <a:rPr lang="en-US" sz="1200" dirty="0">
+                <a:solidFill>
+                  <a:srgbClr val="4A6CF7"/>
+                </a:solidFill>
+                <a:latin typeface="Calibri" pitchFamily="34" charset="0"/>
+                <a:ea typeface="Calibri" pitchFamily="34" charset="-122"/>
+                <a:cs typeface="Calibri" pitchFamily="34" charset="-120"/>
+              </a:rPr>
+              <a:t>3B</a:t>
+            </a:r>
+            <a:endParaRPr lang="en-US" sz="1200" dirty="0"/>
+          </a:p>
+        </p:txBody>
+      </p:sp>
+      <p:sp>
+        <p:nvSpPr>
+          <p:cNvPr id="26" name="Text 24"/>
+          <p:cNvSpPr/>
+          <p:nvPr/>
+        </p:nvSpPr>
+        <p:spPr>
+          <a:xfrm>
+            <a:off x="5669280" y="2825496"/>
+            <a:ext cx="1097280" cy="438912"/>
+          </a:xfrm>
+          <a:prstGeom prst="rect">
+            <a:avLst/>
+          </a:prstGeom>
+          <a:solidFill>
+            <a:srgbClr val="FFFFFF"/>
+          </a:solidFill>
+          <a:ln/>
+        </p:spPr>
+        <p:txBody>
+          <a:bodyPr wrap="square" lIns="0" tIns="0" rIns="0" bIns="0" rtlCol="0" anchor="ctr"/>
+          <a:lstStyle/>
+          <a:p>
+            <a:pPr algn="ctr" indent="0" marL="0">
+              <a:buNone/>
+            </a:pPr>
+            <a:r>
+              <a:rPr lang="en-US" sz="1200" dirty="0">
+                <a:solidFill>
+                  <a:srgbClr val="E65100"/>
+                </a:solidFill>
+                <a:latin typeface="Calibri" pitchFamily="34" charset="0"/>
+                <a:ea typeface="Calibri" pitchFamily="34" charset="-122"/>
+                <a:cs typeface="Calibri" pitchFamily="34" charset="-120"/>
+              </a:rPr>
+              <a:t>int8</a:t>
+            </a:r>
+            <a:endParaRPr lang="en-US" sz="1200" dirty="0"/>
+          </a:p>
+        </p:txBody>
+      </p:sp>
+      <p:sp>
+        <p:nvSpPr>
+          <p:cNvPr id="27" name="Text 25"/>
+          <p:cNvSpPr/>
+          <p:nvPr/>
+        </p:nvSpPr>
+        <p:spPr>
+          <a:xfrm>
+            <a:off x="6858000" y="2825496"/>
+            <a:ext cx="1097280" cy="438912"/>
+          </a:xfrm>
+          <a:prstGeom prst="rect">
+            <a:avLst/>
+          </a:prstGeom>
+          <a:solidFill>
+            <a:srgbClr val="FFFFFF"/>
+          </a:solidFill>
+          <a:ln/>
+        </p:spPr>
+        <p:txBody>
+          <a:bodyPr wrap="square" lIns="0" tIns="0" rIns="0" bIns="0" rtlCol="0" anchor="ctr"/>
+          <a:lstStyle/>
+          <a:p>
+            <a:pPr algn="ctr" indent="0" marL="0">
+              <a:buNone/>
+            </a:pPr>
+            <a:r>
+              <a:rPr lang="en-US" sz="1200" dirty="0">
+                <a:solidFill>
+                  <a:srgbClr val="1A1A2E"/>
+                </a:solidFill>
+                <a:latin typeface="Calibri" pitchFamily="34" charset="0"/>
+                <a:ea typeface="Calibri" pitchFamily="34" charset="-122"/>
+                <a:cs typeface="Calibri" pitchFamily="34" charset="-120"/>
+              </a:rPr>
+              <a:t>1</a:t>
+            </a:r>
+            <a:endParaRPr lang="en-US" sz="1200" dirty="0"/>
+          </a:p>
+        </p:txBody>
+      </p:sp>
+      <p:sp>
+        <p:nvSpPr>
+          <p:cNvPr id="28" name="Text 26"/>
+          <p:cNvSpPr/>
+          <p:nvPr/>
+        </p:nvSpPr>
+        <p:spPr>
+          <a:xfrm>
+            <a:off x="731520" y="3264408"/>
+            <a:ext cx="1828800" cy="438912"/>
+          </a:xfrm>
+          <a:prstGeom prst="rect">
+            <a:avLst/>
+          </a:prstGeom>
+          <a:solidFill>
+            <a:srgbClr val="F5F7FA"/>
+          </a:solidFill>
+          <a:ln/>
+        </p:spPr>
+        <p:txBody>
+          <a:bodyPr wrap="square" lIns="0" tIns="0" rIns="0" bIns="0" rtlCol="0" anchor="ctr"/>
+          <a:lstStyle/>
+          <a:p>
+            <a:pPr algn="ctr" indent="0" marL="0">
+              <a:buNone/>
+            </a:pPr>
+            <a:r>
+              <a:rPr lang="en-US" sz="1200" b="1" dirty="0">
+                <a:solidFill>
+                  <a:srgbClr val="1A1A2E"/>
+                </a:solidFill>
+                <a:latin typeface="Calibri" pitchFamily="34" charset="0"/>
+                <a:ea typeface="Calibri" pitchFamily="34" charset="-122"/>
+                <a:cs typeface="Calibri" pitchFamily="34" charset="-120"/>
+              </a:rPr>
+              <a:t>RTX 3060 (12GB)</a:t>
+            </a:r>
+            <a:endParaRPr lang="en-US" sz="1200" dirty="0"/>
+          </a:p>
+        </p:txBody>
+      </p:sp>
+      <p:sp>
+        <p:nvSpPr>
+          <p:cNvPr id="29" name="Text 27"/>
+          <p:cNvSpPr/>
+          <p:nvPr/>
+        </p:nvSpPr>
+        <p:spPr>
+          <a:xfrm>
+            <a:off x="2743200" y="3264408"/>
+            <a:ext cx="1463040" cy="438912"/>
+          </a:xfrm>
+          <a:prstGeom prst="rect">
+            <a:avLst/>
+          </a:prstGeom>
+          <a:solidFill>
+            <a:srgbClr val="F5F7FA"/>
+          </a:solidFill>
+          <a:ln/>
+        </p:spPr>
+        <p:txBody>
+          <a:bodyPr wrap="square" lIns="0" tIns="0" rIns="0" bIns="0" rtlCol="0" anchor="ctr"/>
+          <a:lstStyle/>
+          <a:p>
+            <a:pPr algn="ctr" indent="0" marL="0">
+              <a:buNone/>
+            </a:pPr>
+            <a:r>
+              <a:rPr lang="en-US" sz="1200" dirty="0">
+                <a:solidFill>
+                  <a:srgbClr val="1A1A2E"/>
+                </a:solidFill>
+                <a:latin typeface="Calibri" pitchFamily="34" charset="0"/>
+                <a:ea typeface="Calibri" pitchFamily="34" charset="-122"/>
+                <a:cs typeface="Calibri" pitchFamily="34" charset="-120"/>
+              </a:rPr>
+              <a:t>소비자</a:t>
+            </a:r>
+            <a:endParaRPr lang="en-US" sz="1200" dirty="0"/>
+          </a:p>
+        </p:txBody>
+      </p:sp>
+      <p:sp>
+        <p:nvSpPr>
+          <p:cNvPr id="30" name="Text 28"/>
+          <p:cNvSpPr/>
+          <p:nvPr/>
+        </p:nvSpPr>
+        <p:spPr>
+          <a:xfrm>
+            <a:off x="4389120" y="3264408"/>
+            <a:ext cx="1097280" cy="438912"/>
+          </a:xfrm>
+          <a:prstGeom prst="rect">
+            <a:avLst/>
+          </a:prstGeom>
+          <a:solidFill>
+            <a:srgbClr val="F5F7FA"/>
+          </a:solidFill>
+          <a:ln/>
+        </p:spPr>
+        <p:txBody>
+          <a:bodyPr wrap="square" lIns="0" tIns="0" rIns="0" bIns="0" rtlCol="0" anchor="ctr"/>
+          <a:lstStyle/>
+          <a:p>
+            <a:pPr algn="ctr" indent="0" marL="0">
+              <a:buNone/>
+            </a:pPr>
+            <a:r>
+              <a:rPr lang="en-US" sz="1200" dirty="0">
+                <a:solidFill>
+                  <a:srgbClr val="4A6CF7"/>
+                </a:solidFill>
+                <a:latin typeface="Calibri" pitchFamily="34" charset="0"/>
+                <a:ea typeface="Calibri" pitchFamily="34" charset="-122"/>
+                <a:cs typeface="Calibri" pitchFamily="34" charset="-120"/>
+              </a:rPr>
+              <a:t>3B</a:t>
+            </a:r>
+            <a:endParaRPr lang="en-US" sz="1200" dirty="0"/>
+          </a:p>
+        </p:txBody>
+      </p:sp>
+      <p:sp>
+        <p:nvSpPr>
+          <p:cNvPr id="31" name="Text 29"/>
+          <p:cNvSpPr/>
+          <p:nvPr/>
+        </p:nvSpPr>
+        <p:spPr>
+          <a:xfrm>
+            <a:off x="5669280" y="3264408"/>
+            <a:ext cx="1097280" cy="438912"/>
+          </a:xfrm>
+          <a:prstGeom prst="rect">
+            <a:avLst/>
+          </a:prstGeom>
+          <a:solidFill>
+            <a:srgbClr val="F5F7FA"/>
+          </a:solidFill>
+          <a:ln/>
+        </p:spPr>
+        <p:txBody>
+          <a:bodyPr wrap="square" lIns="0" tIns="0" rIns="0" bIns="0" rtlCol="0" anchor="ctr"/>
+          <a:lstStyle/>
+          <a:p>
+            <a:pPr algn="ctr" indent="0" marL="0">
+              <a:buNone/>
+            </a:pPr>
+            <a:r>
+              <a:rPr lang="en-US" sz="1200" dirty="0">
+                <a:solidFill>
+                  <a:srgbClr val="E65100"/>
+                </a:solidFill>
+                <a:latin typeface="Calibri" pitchFamily="34" charset="0"/>
+                <a:ea typeface="Calibri" pitchFamily="34" charset="-122"/>
+                <a:cs typeface="Calibri" pitchFamily="34" charset="-120"/>
+              </a:rPr>
+              <a:t>int8</a:t>
+            </a:r>
+            <a:endParaRPr lang="en-US" sz="1200" dirty="0"/>
+          </a:p>
+        </p:txBody>
+      </p:sp>
+      <p:sp>
+        <p:nvSpPr>
+          <p:cNvPr id="32" name="Text 30"/>
+          <p:cNvSpPr/>
+          <p:nvPr/>
+        </p:nvSpPr>
+        <p:spPr>
+          <a:xfrm>
+            <a:off x="6858000" y="3264408"/>
+            <a:ext cx="1097280" cy="438912"/>
+          </a:xfrm>
+          <a:prstGeom prst="rect">
+            <a:avLst/>
+          </a:prstGeom>
+          <a:solidFill>
+            <a:srgbClr val="F5F7FA"/>
+          </a:solidFill>
+          <a:ln/>
+        </p:spPr>
+        <p:txBody>
+          <a:bodyPr wrap="square" lIns="0" tIns="0" rIns="0" bIns="0" rtlCol="0" anchor="ctr"/>
+          <a:lstStyle/>
+          <a:p>
+            <a:pPr algn="ctr" indent="0" marL="0">
+              <a:buNone/>
+            </a:pPr>
+            <a:r>
+              <a:rPr lang="en-US" sz="1200" dirty="0">
+                <a:solidFill>
+                  <a:srgbClr val="1A1A2E"/>
+                </a:solidFill>
+                <a:latin typeface="Calibri" pitchFamily="34" charset="0"/>
+                <a:ea typeface="Calibri" pitchFamily="34" charset="-122"/>
+                <a:cs typeface="Calibri" pitchFamily="34" charset="-120"/>
+              </a:rPr>
+              <a:t>1</a:t>
+            </a:r>
+            <a:endParaRPr lang="en-US" sz="1200" dirty="0"/>
+          </a:p>
+        </p:txBody>
+      </p:sp>
+      <p:sp>
+        <p:nvSpPr>
+          <p:cNvPr id="33" name="Text 31"/>
+          <p:cNvSpPr/>
+          <p:nvPr/>
+        </p:nvSpPr>
+        <p:spPr>
+          <a:xfrm>
+            <a:off x="731520" y="3703320"/>
+            <a:ext cx="1828800" cy="438912"/>
+          </a:xfrm>
+          <a:prstGeom prst="rect">
+            <a:avLst/>
+          </a:prstGeom>
+          <a:solidFill>
+            <a:srgbClr val="FFFFFF"/>
+          </a:solidFill>
+          <a:ln/>
+        </p:spPr>
+        <p:txBody>
+          <a:bodyPr wrap="square" lIns="0" tIns="0" rIns="0" bIns="0" rtlCol="0" anchor="ctr"/>
+          <a:lstStyle/>
+          <a:p>
+            <a:pPr algn="ctr" indent="0" marL="0">
+              <a:buNone/>
+            </a:pPr>
+            <a:r>
+              <a:rPr lang="en-US" sz="1200" b="1" dirty="0">
+                <a:solidFill>
+                  <a:srgbClr val="1A1A2E"/>
+                </a:solidFill>
+                <a:latin typeface="Calibri" pitchFamily="34" charset="0"/>
+                <a:ea typeface="Calibri" pitchFamily="34" charset="-122"/>
+                <a:cs typeface="Calibri" pitchFamily="34" charset="-120"/>
+              </a:rPr>
+              <a:t>AMD MI300X</a:t>
+            </a:r>
+            <a:endParaRPr lang="en-US" sz="1200" dirty="0"/>
+          </a:p>
+        </p:txBody>
+      </p:sp>
+      <p:sp>
+        <p:nvSpPr>
+          <p:cNvPr id="34" name="Text 32"/>
+          <p:cNvSpPr/>
+          <p:nvPr/>
+        </p:nvSpPr>
+        <p:spPr>
+          <a:xfrm>
+            <a:off x="2743200" y="3703320"/>
+            <a:ext cx="1463040" cy="438912"/>
+          </a:xfrm>
+          <a:prstGeom prst="rect">
+            <a:avLst/>
+          </a:prstGeom>
+          <a:solidFill>
+            <a:srgbClr val="FFFFFF"/>
+          </a:solidFill>
+          <a:ln/>
+        </p:spPr>
+        <p:txBody>
+          <a:bodyPr wrap="square" lIns="0" tIns="0" rIns="0" bIns="0" rtlCol="0" anchor="ctr"/>
+          <a:lstStyle/>
+          <a:p>
+            <a:pPr algn="ctr" indent="0" marL="0">
+              <a:buNone/>
+            </a:pPr>
+            <a:r>
+              <a:rPr lang="en-US" sz="1200" dirty="0">
+                <a:solidFill>
+                  <a:srgbClr val="1A1A2E"/>
+                </a:solidFill>
+                <a:latin typeface="Calibri" pitchFamily="34" charset="0"/>
+                <a:ea typeface="Calibri" pitchFamily="34" charset="-122"/>
+                <a:cs typeface="Calibri" pitchFamily="34" charset="-120"/>
+              </a:rPr>
+              <a:t>ROCm</a:t>
+            </a:r>
+            <a:endParaRPr lang="en-US" sz="1200" dirty="0"/>
+          </a:p>
+        </p:txBody>
+      </p:sp>
+      <p:sp>
+        <p:nvSpPr>
+          <p:cNvPr id="35" name="Text 33"/>
+          <p:cNvSpPr/>
+          <p:nvPr/>
+        </p:nvSpPr>
+        <p:spPr>
+          <a:xfrm>
+            <a:off x="4389120" y="3703320"/>
+            <a:ext cx="1097280" cy="438912"/>
+          </a:xfrm>
+          <a:prstGeom prst="rect">
+            <a:avLst/>
+          </a:prstGeom>
+          <a:solidFill>
+            <a:srgbClr val="FFFFFF"/>
+          </a:solidFill>
+          <a:ln/>
+        </p:spPr>
+        <p:txBody>
+          <a:bodyPr wrap="square" lIns="0" tIns="0" rIns="0" bIns="0" rtlCol="0" anchor="ctr"/>
+          <a:lstStyle/>
+          <a:p>
+            <a:pPr algn="ctr" indent="0" marL="0">
+              <a:buNone/>
+            </a:pPr>
+            <a:r>
+              <a:rPr lang="en-US" sz="1200" dirty="0">
+                <a:solidFill>
+                  <a:srgbClr val="1A1A2E"/>
+                </a:solidFill>
+                <a:latin typeface="Calibri" pitchFamily="34" charset="0"/>
+                <a:ea typeface="Calibri" pitchFamily="34" charset="-122"/>
+                <a:cs typeface="Calibri" pitchFamily="34" charset="-120"/>
+              </a:rPr>
+              <a:t>8B</a:t>
+            </a:r>
+            <a:endParaRPr lang="en-US" sz="1200" dirty="0"/>
+          </a:p>
+        </p:txBody>
+      </p:sp>
+      <p:sp>
+        <p:nvSpPr>
+          <p:cNvPr id="36" name="Text 34"/>
+          <p:cNvSpPr/>
+          <p:nvPr/>
+        </p:nvSpPr>
+        <p:spPr>
+          <a:xfrm>
+            <a:off x="5669280" y="3703320"/>
+            <a:ext cx="1097280" cy="438912"/>
+          </a:xfrm>
+          <a:prstGeom prst="rect">
+            <a:avLst/>
+          </a:prstGeom>
+          <a:solidFill>
+            <a:srgbClr val="FFFFFF"/>
+          </a:solidFill>
+          <a:ln/>
+        </p:spPr>
+        <p:txBody>
+          <a:bodyPr wrap="square" lIns="0" tIns="0" rIns="0" bIns="0" rtlCol="0" anchor="ctr"/>
+          <a:lstStyle/>
+          <a:p>
+            <a:pPr algn="ctr" indent="0" marL="0">
+              <a:buNone/>
+            </a:pPr>
+            <a:r>
+              <a:rPr lang="en-US" sz="1200" dirty="0">
+                <a:solidFill>
+                  <a:srgbClr val="1A1A2E"/>
+                </a:solidFill>
+                <a:latin typeface="Calibri" pitchFamily="34" charset="0"/>
+                <a:ea typeface="Calibri" pitchFamily="34" charset="-122"/>
+                <a:cs typeface="Calibri" pitchFamily="34" charset="-120"/>
+              </a:rPr>
+              <a:t>none</a:t>
+            </a:r>
+            <a:endParaRPr lang="en-US" sz="1200" dirty="0"/>
+          </a:p>
+        </p:txBody>
+      </p:sp>
+      <p:sp>
+        <p:nvSpPr>
+          <p:cNvPr id="37" name="Text 35"/>
+          <p:cNvSpPr/>
+          <p:nvPr/>
+        </p:nvSpPr>
+        <p:spPr>
+          <a:xfrm>
+            <a:off x="6858000" y="3703320"/>
+            <a:ext cx="1097280" cy="438912"/>
+          </a:xfrm>
+          <a:prstGeom prst="rect">
+            <a:avLst/>
+          </a:prstGeom>
+          <a:solidFill>
+            <a:srgbClr val="FFFFFF"/>
+          </a:solidFill>
+          <a:ln/>
+        </p:spPr>
+        <p:txBody>
+          <a:bodyPr wrap="square" lIns="0" tIns="0" rIns="0" bIns="0" rtlCol="0" anchor="ctr"/>
+          <a:lstStyle/>
+          <a:p>
+            <a:pPr algn="ctr" indent="0" marL="0">
+              <a:buNone/>
+            </a:pPr>
+            <a:r>
+              <a:rPr lang="en-US" sz="1200" dirty="0">
+                <a:solidFill>
+                  <a:srgbClr val="1A1A2E"/>
+                </a:solidFill>
+                <a:latin typeface="Calibri" pitchFamily="34" charset="0"/>
+                <a:ea typeface="Calibri" pitchFamily="34" charset="-122"/>
+                <a:cs typeface="Calibri" pitchFamily="34" charset="-120"/>
+              </a:rPr>
+              <a:t>8</a:t>
+            </a:r>
+            <a:endParaRPr lang="en-US" sz="1200" dirty="0"/>
+          </a:p>
+        </p:txBody>
+      </p:sp>
+      <p:sp>
+        <p:nvSpPr>
+          <p:cNvPr id="38" name="Text 36"/>
+          <p:cNvSpPr/>
+          <p:nvPr/>
+        </p:nvSpPr>
+        <p:spPr>
+          <a:xfrm>
+            <a:off x="731520" y="4142232"/>
+            <a:ext cx="1828800" cy="438912"/>
+          </a:xfrm>
+          <a:prstGeom prst="rect">
+            <a:avLst/>
+          </a:prstGeom>
+          <a:solidFill>
+            <a:srgbClr val="F5F7FA"/>
+          </a:solidFill>
+          <a:ln/>
+        </p:spPr>
+        <p:txBody>
+          <a:bodyPr wrap="square" lIns="0" tIns="0" rIns="0" bIns="0" rtlCol="0" anchor="ctr"/>
+          <a:lstStyle/>
+          <a:p>
+            <a:pPr algn="ctr" indent="0" marL="0">
+              <a:buNone/>
+            </a:pPr>
+            <a:r>
+              <a:rPr lang="en-US" sz="1200" b="1" dirty="0">
+                <a:solidFill>
+                  <a:srgbClr val="1A1A2E"/>
+                </a:solidFill>
+                <a:latin typeface="Calibri" pitchFamily="34" charset="0"/>
+                <a:ea typeface="Calibri" pitchFamily="34" charset="-122"/>
+                <a:cs typeface="Calibri" pitchFamily="34" charset="-120"/>
+              </a:rPr>
+              <a:t>CPU only</a:t>
+            </a:r>
+            <a:endParaRPr lang="en-US" sz="1200" dirty="0"/>
+          </a:p>
+        </p:txBody>
+      </p:sp>
+      <p:sp>
+        <p:nvSpPr>
+          <p:cNvPr id="39" name="Text 37"/>
+          <p:cNvSpPr/>
+          <p:nvPr/>
+        </p:nvSpPr>
+        <p:spPr>
+          <a:xfrm>
+            <a:off x="2743200" y="4142232"/>
+            <a:ext cx="1463040" cy="438912"/>
+          </a:xfrm>
+          <a:prstGeom prst="rect">
+            <a:avLst/>
+          </a:prstGeom>
+          <a:solidFill>
+            <a:srgbClr val="F5F7FA"/>
+          </a:solidFill>
+          <a:ln/>
+        </p:spPr>
+        <p:txBody>
+          <a:bodyPr wrap="square" lIns="0" tIns="0" rIns="0" bIns="0" rtlCol="0" anchor="ctr"/>
+          <a:lstStyle/>
+          <a:p>
+            <a:pPr algn="ctr" indent="0" marL="0">
+              <a:buNone/>
+            </a:pPr>
+            <a:r>
+              <a:rPr lang="en-US" sz="1200" dirty="0">
+                <a:solidFill>
+                  <a:srgbClr val="1A1A2E"/>
+                </a:solidFill>
+                <a:latin typeface="Calibri" pitchFamily="34" charset="0"/>
+                <a:ea typeface="Calibri" pitchFamily="34" charset="-122"/>
+                <a:cs typeface="Calibri" pitchFamily="34" charset="-120"/>
+              </a:rPr>
+              <a:t>x86/ARM</a:t>
+            </a:r>
+            <a:endParaRPr lang="en-US" sz="1200" dirty="0"/>
+          </a:p>
+        </p:txBody>
+      </p:sp>
+      <p:sp>
+        <p:nvSpPr>
+          <p:cNvPr id="40" name="Text 38"/>
+          <p:cNvSpPr/>
+          <p:nvPr/>
+        </p:nvSpPr>
+        <p:spPr>
+          <a:xfrm>
+            <a:off x="4389120" y="4142232"/>
+            <a:ext cx="1097280" cy="438912"/>
+          </a:xfrm>
+          <a:prstGeom prst="rect">
+            <a:avLst/>
+          </a:prstGeom>
+          <a:solidFill>
+            <a:srgbClr val="F5F7FA"/>
+          </a:solidFill>
+          <a:ln/>
+        </p:spPr>
+        <p:txBody>
+          <a:bodyPr wrap="square" lIns="0" tIns="0" rIns="0" bIns="0" rtlCol="0" anchor="ctr"/>
+          <a:lstStyle/>
+          <a:p>
+            <a:pPr algn="ctr" indent="0" marL="0">
+              <a:buNone/>
+            </a:pPr>
+            <a:r>
+              <a:rPr lang="en-US" sz="1200" dirty="0">
+                <a:solidFill>
+                  <a:srgbClr val="1A1A2E"/>
+                </a:solidFill>
+                <a:latin typeface="Calibri" pitchFamily="34" charset="0"/>
+                <a:ea typeface="Calibri" pitchFamily="34" charset="-122"/>
+                <a:cs typeface="Calibri" pitchFamily="34" charset="-120"/>
+              </a:rPr>
+              <a:t>-</a:t>
+            </a:r>
+            <a:endParaRPr lang="en-US" sz="1200" dirty="0"/>
+          </a:p>
+        </p:txBody>
+      </p:sp>
+      <p:sp>
+        <p:nvSpPr>
+          <p:cNvPr id="41" name="Text 39"/>
+          <p:cNvSpPr/>
+          <p:nvPr/>
+        </p:nvSpPr>
+        <p:spPr>
+          <a:xfrm>
+            <a:off x="5669280" y="4142232"/>
+            <a:ext cx="1097280" cy="438912"/>
+          </a:xfrm>
+          <a:prstGeom prst="rect">
+            <a:avLst/>
+          </a:prstGeom>
+          <a:solidFill>
+            <a:srgbClr val="F5F7FA"/>
+          </a:solidFill>
+          <a:ln/>
+        </p:spPr>
+        <p:txBody>
+          <a:bodyPr wrap="square" lIns="0" tIns="0" rIns="0" bIns="0" rtlCol="0" anchor="ctr"/>
+          <a:lstStyle/>
+          <a:p>
+            <a:pPr algn="ctr" indent="0" marL="0">
+              <a:buNone/>
+            </a:pPr>
+            <a:r>
+              <a:rPr lang="en-US" sz="1200" dirty="0">
+                <a:solidFill>
+                  <a:srgbClr val="1A1A2E"/>
+                </a:solidFill>
+                <a:latin typeface="Calibri" pitchFamily="34" charset="0"/>
+                <a:ea typeface="Calibri" pitchFamily="34" charset="-122"/>
+                <a:cs typeface="Calibri" pitchFamily="34" charset="-120"/>
+              </a:rPr>
+              <a:t>-</a:t>
+            </a:r>
+            <a:endParaRPr lang="en-US" sz="1200" dirty="0"/>
+          </a:p>
+        </p:txBody>
+      </p:sp>
+      <p:sp>
+        <p:nvSpPr>
+          <p:cNvPr id="42" name="Text 40"/>
+          <p:cNvSpPr/>
+          <p:nvPr/>
+        </p:nvSpPr>
+        <p:spPr>
+          <a:xfrm>
+            <a:off x="6858000" y="4142232"/>
+            <a:ext cx="1097280" cy="438912"/>
+          </a:xfrm>
+          <a:prstGeom prst="rect">
+            <a:avLst/>
+          </a:prstGeom>
+          <a:solidFill>
+            <a:srgbClr val="F5F7FA"/>
+          </a:solidFill>
+          <a:ln/>
+        </p:spPr>
+        <p:txBody>
+          <a:bodyPr wrap="square" lIns="0" tIns="0" rIns="0" bIns="0" rtlCol="0" anchor="ctr"/>
+          <a:lstStyle/>
+          <a:p>
+            <a:pPr algn="ctr" indent="0" marL="0">
+              <a:buNone/>
+            </a:pPr>
+            <a:r>
+              <a:rPr lang="en-US" sz="1200" dirty="0">
+                <a:solidFill>
+                  <a:srgbClr val="1A1A2E"/>
+                </a:solidFill>
+                <a:latin typeface="Calibri" pitchFamily="34" charset="0"/>
+                <a:ea typeface="Calibri" pitchFamily="34" charset="-122"/>
+                <a:cs typeface="Calibri" pitchFamily="34" charset="-120"/>
+              </a:rPr>
+              <a:t>-</a:t>
+            </a:r>
+            <a:endParaRPr lang="en-US" sz="1200" dirty="0"/>
+          </a:p>
+        </p:txBody>
+      </p:sp>
+      <p:sp>
+        <p:nvSpPr>
+          <p:cNvPr id="43" name="Text 41"/>
+          <p:cNvSpPr/>
+          <p:nvPr/>
+        </p:nvSpPr>
+        <p:spPr>
+          <a:xfrm>
+            <a:off x="731520" y="4572000"/>
+            <a:ext cx="7680960" cy="365760"/>
+          </a:xfrm>
+          <a:prstGeom prst="rect">
+            <a:avLst/>
+          </a:prstGeom>
+          <a:noFill/>
+          <a:ln/>
+        </p:spPr>
+        <p:txBody>
+          <a:bodyPr wrap="square" rtlCol="0" anchor="ctr"/>
+          <a:lstStyle/>
+          <a:p>
+            <a:pPr indent="0" marL="0">
+              <a:buNone/>
+            </a:pPr>
+            <a:r>
+              <a:rPr lang="en-US" sz="1300" dirty="0">
+                <a:solidFill>
+                  <a:srgbClr val="4A6CF7"/>
+                </a:solidFill>
+                <a:latin typeface="Consolas" pitchFamily="34" charset="0"/>
+                <a:ea typeface="Consolas" pitchFamily="34" charset="-122"/>
+                <a:cs typeface="Consolas" pitchFamily="34" charset="-120"/>
+              </a:rPr>
+              <a:t>python run.py --check  →  GPU 자동 감지 + 최적 설정 자동 결정</a:t>
+            </a:r>
+            <a:endParaRPr lang="en-US" sz="1300" dirty="0"/>
+          </a:p>
+        </p:txBody>
+      </p:sp>
+    </p:spTree>
+  </p:cSld>
+  <p:clrMapOvr>
+    <a:masterClrMapping/>
+  </p:clrMapOvr>
+</p:sld>
+</file>
+
+<file path=ppt/slides/slide11.xml><?xml version="1.0" encoding="utf-8"?>
+<p:sld xmlns:a="http://schemas.openxmlformats.org/drawingml/2006/main" xmlns:r="http://schemas.openxmlformats.org/officeDocument/2006/relationships" xmlns:p="http://schemas.openxmlformats.org/presentationml/2006/main">
+  <p:cSld name="Slide 11">
+    <p:bg>
+      <p:bgPr>
+        <a:solidFill>
+          <a:srgbClr val="1A1A2E"/>
+        </a:solidFill>
+      </p:bgPr>
+    </p:bg>
+    <p:spTree>
+      <p:nvGrpSpPr>
+        <p:cNvPr id="1" name=""/>
+        <p:cNvGrpSpPr/>
+        <p:nvPr/>
+      </p:nvGrpSpPr>
+      <p:grpSpPr>
+        <a:xfrm>
+          <a:off x="0" y="0"/>
+          <a:ext cx="0" cy="0"/>
+          <a:chOff x="0" y="0"/>
+          <a:chExt cx="0" cy="0"/>
+        </a:xfrm>
+      </p:grpSpPr>
+      <p:sp>
+        <p:nvSpPr>
+          <p:cNvPr id="2" name="Text 0"/>
+          <p:cNvSpPr/>
+          <p:nvPr/>
+        </p:nvSpPr>
+        <p:spPr>
+          <a:xfrm>
+            <a:off x="731520" y="274320"/>
+            <a:ext cx="7680960" cy="640080"/>
+          </a:xfrm>
+          <a:prstGeom prst="rect">
+            <a:avLst/>
+          </a:prstGeom>
+          <a:noFill/>
+          <a:ln/>
+        </p:spPr>
+        <p:txBody>
+          <a:bodyPr wrap="square" rtlCol="0" anchor="ctr"/>
+          <a:lstStyle/>
+          <a:p>
+            <a:pPr indent="0" marL="0">
+              <a:buNone/>
+            </a:pPr>
+            <a:r>
+              <a:rPr lang="en-US" sz="3600" dirty="0">
+                <a:solidFill>
+                  <a:srgbClr val="FFFFFF"/>
+                </a:solidFill>
+                <a:latin typeface="Arial Black" pitchFamily="34" charset="0"/>
+                <a:ea typeface="Arial Black" pitchFamily="34" charset="-122"/>
+                <a:cs typeface="Arial Black" pitchFamily="34" charset="-120"/>
+              </a:rPr>
+              <a:t>프로젝트 현황</a:t>
+            </a:r>
+            <a:endParaRPr lang="en-US" sz="3600" dirty="0"/>
+          </a:p>
+        </p:txBody>
+      </p:sp>
+      <p:sp>
+        <p:nvSpPr>
+          <p:cNvPr id="3" name="Shape 1"/>
+          <p:cNvSpPr/>
+          <p:nvPr/>
+        </p:nvSpPr>
+        <p:spPr>
+          <a:xfrm>
+            <a:off x="731520" y="1097280"/>
+            <a:ext cx="2560320" cy="1097280"/>
+          </a:xfrm>
+          <a:prstGeom prst="roundRect">
+            <a:avLst>
+              <a:gd name="adj" fmla="val 8333"/>
+            </a:avLst>
+          </a:prstGeom>
+          <a:solidFill>
+            <a:srgbClr val="16213E"/>
+          </a:solidFill>
+          <a:ln/>
+        </p:spPr>
+      </p:sp>
+      <p:sp>
+        <p:nvSpPr>
+          <p:cNvPr id="4" name="Text 2"/>
+          <p:cNvSpPr/>
+          <p:nvPr/>
+        </p:nvSpPr>
+        <p:spPr>
+          <a:xfrm>
+            <a:off x="731520" y="1188720"/>
+            <a:ext cx="2560320" cy="548640"/>
+          </a:xfrm>
+          <a:prstGeom prst="rect">
+            <a:avLst/>
+          </a:prstGeom>
+          <a:noFill/>
+          <a:ln/>
+        </p:spPr>
+        <p:txBody>
+          <a:bodyPr wrap="square" lIns="0" tIns="0" rIns="0" bIns="0" rtlCol="0" anchor="ctr"/>
+          <a:lstStyle/>
+          <a:p>
+            <a:pPr algn="ctr" indent="0" marL="0">
+              <a:buNone/>
+            </a:pPr>
+            <a:r>
+              <a:rPr lang="en-US" sz="2800" dirty="0">
+                <a:solidFill>
+                  <a:srgbClr val="4A6CF7"/>
+                </a:solidFill>
+                <a:latin typeface="Arial Black" pitchFamily="34" charset="0"/>
+                <a:ea typeface="Arial Black" pitchFamily="34" charset="-122"/>
+                <a:cs typeface="Arial Black" pitchFamily="34" charset="-120"/>
+              </a:rPr>
+              <a:t>150+</a:t>
+            </a:r>
+            <a:endParaRPr lang="en-US" sz="2800" dirty="0"/>
+          </a:p>
+        </p:txBody>
+      </p:sp>
+      <p:sp>
+        <p:nvSpPr>
+          <p:cNvPr id="5" name="Text 3"/>
+          <p:cNvSpPr/>
+          <p:nvPr/>
+        </p:nvSpPr>
+        <p:spPr>
+          <a:xfrm>
+            <a:off x="731520" y="1737360"/>
+            <a:ext cx="2560320" cy="365760"/>
+          </a:xfrm>
+          <a:prstGeom prst="rect">
+            <a:avLst/>
+          </a:prstGeom>
+          <a:noFill/>
+          <a:ln/>
+        </p:spPr>
+        <p:txBody>
+          <a:bodyPr wrap="square" lIns="0" tIns="0" rIns="0" bIns="0" rtlCol="0" anchor="ctr"/>
+          <a:lstStyle/>
+          <a:p>
+            <a:pPr algn="ctr" indent="0" marL="0">
+              <a:buNone/>
+            </a:pPr>
+            <a:r>
+              <a:rPr lang="en-US" sz="1400" dirty="0">
+                <a:solidFill>
+                  <a:srgbClr val="CADCFC"/>
+                </a:solidFill>
+                <a:latin typeface="Calibri" pitchFamily="34" charset="0"/>
+                <a:ea typeface="Calibri" pitchFamily="34" charset="-122"/>
+                <a:cs typeface="Calibri" pitchFamily="34" charset="-120"/>
+              </a:rPr>
+              <a:t>총 파일</a:t>
+            </a:r>
+            <a:endParaRPr lang="en-US" sz="1400" dirty="0"/>
+          </a:p>
+        </p:txBody>
+      </p:sp>
+      <p:sp>
+        <p:nvSpPr>
+          <p:cNvPr id="6" name="Shape 4"/>
+          <p:cNvSpPr/>
+          <p:nvPr/>
+        </p:nvSpPr>
+        <p:spPr>
+          <a:xfrm>
+            <a:off x="3566160" y="1097280"/>
+            <a:ext cx="2560320" cy="1097280"/>
+          </a:xfrm>
+          <a:prstGeom prst="roundRect">
+            <a:avLst>
+              <a:gd name="adj" fmla="val 8333"/>
+            </a:avLst>
+          </a:prstGeom>
+          <a:solidFill>
+            <a:srgbClr val="16213E"/>
+          </a:solidFill>
+          <a:ln/>
+        </p:spPr>
+      </p:sp>
+      <p:sp>
+        <p:nvSpPr>
+          <p:cNvPr id="7" name="Text 5"/>
+          <p:cNvSpPr/>
+          <p:nvPr/>
+        </p:nvSpPr>
+        <p:spPr>
+          <a:xfrm>
+            <a:off x="3566160" y="1188720"/>
+            <a:ext cx="2560320" cy="548640"/>
+          </a:xfrm>
+          <a:prstGeom prst="rect">
+            <a:avLst/>
+          </a:prstGeom>
+          <a:noFill/>
+          <a:ln/>
+        </p:spPr>
+        <p:txBody>
+          <a:bodyPr wrap="square" lIns="0" tIns="0" rIns="0" bIns="0" rtlCol="0" anchor="ctr"/>
+          <a:lstStyle/>
+          <a:p>
+            <a:pPr algn="ctr" indent="0" marL="0">
+              <a:buNone/>
+            </a:pPr>
+            <a:r>
+              <a:rPr lang="en-US" sz="2800" dirty="0">
+                <a:solidFill>
+                  <a:srgbClr val="4A6CF7"/>
+                </a:solidFill>
+                <a:latin typeface="Arial Black" pitchFamily="34" charset="0"/>
+                <a:ea typeface="Arial Black" pitchFamily="34" charset="-122"/>
+                <a:cs typeface="Arial Black" pitchFamily="34" charset="-120"/>
+              </a:rPr>
+              <a:t>16,000+</a:t>
+            </a:r>
+            <a:endParaRPr lang="en-US" sz="2800" dirty="0"/>
+          </a:p>
+        </p:txBody>
+      </p:sp>
+      <p:sp>
+        <p:nvSpPr>
+          <p:cNvPr id="8" name="Text 6"/>
+          <p:cNvSpPr/>
+          <p:nvPr/>
+        </p:nvSpPr>
+        <p:spPr>
+          <a:xfrm>
+            <a:off x="3566160" y="1737360"/>
+            <a:ext cx="2560320" cy="365760"/>
+          </a:xfrm>
+          <a:prstGeom prst="rect">
+            <a:avLst/>
+          </a:prstGeom>
+          <a:noFill/>
+          <a:ln/>
+        </p:spPr>
+        <p:txBody>
+          <a:bodyPr wrap="square" lIns="0" tIns="0" rIns="0" bIns="0" rtlCol="0" anchor="ctr"/>
+          <a:lstStyle/>
+          <a:p>
+            <a:pPr algn="ctr" indent="0" marL="0">
+              <a:buNone/>
+            </a:pPr>
+            <a:r>
+              <a:rPr lang="en-US" sz="1400" dirty="0">
+                <a:solidFill>
+                  <a:srgbClr val="CADCFC"/>
+                </a:solidFill>
+                <a:latin typeface="Calibri" pitchFamily="34" charset="0"/>
+                <a:ea typeface="Calibri" pitchFamily="34" charset="-122"/>
+                <a:cs typeface="Calibri" pitchFamily="34" charset="-120"/>
+              </a:rPr>
+              <a:t>코드 라인</a:t>
+            </a:r>
+            <a:endParaRPr lang="en-US" sz="1400" dirty="0"/>
+          </a:p>
+        </p:txBody>
+      </p:sp>
+      <p:sp>
+        <p:nvSpPr>
+          <p:cNvPr id="9" name="Shape 7"/>
+          <p:cNvSpPr/>
+          <p:nvPr/>
+        </p:nvSpPr>
+        <p:spPr>
+          <a:xfrm>
+            <a:off x="6400800" y="1097280"/>
+            <a:ext cx="2560320" cy="1097280"/>
+          </a:xfrm>
+          <a:prstGeom prst="roundRect">
+            <a:avLst>
+              <a:gd name="adj" fmla="val 8333"/>
+            </a:avLst>
+          </a:prstGeom>
+          <a:solidFill>
+            <a:srgbClr val="16213E"/>
+          </a:solidFill>
+          <a:ln/>
+        </p:spPr>
+      </p:sp>
+      <p:sp>
+        <p:nvSpPr>
+          <p:cNvPr id="10" name="Text 8"/>
+          <p:cNvSpPr/>
+          <p:nvPr/>
+        </p:nvSpPr>
+        <p:spPr>
+          <a:xfrm>
+            <a:off x="6400800" y="1188720"/>
+            <a:ext cx="2560320" cy="548640"/>
+          </a:xfrm>
+          <a:prstGeom prst="rect">
+            <a:avLst/>
+          </a:prstGeom>
+          <a:noFill/>
+          <a:ln/>
+        </p:spPr>
+        <p:txBody>
+          <a:bodyPr wrap="square" lIns="0" tIns="0" rIns="0" bIns="0" rtlCol="0" anchor="ctr"/>
+          <a:lstStyle/>
+          <a:p>
+            <a:pPr algn="ctr" indent="0" marL="0">
+              <a:buNone/>
+            </a:pPr>
+            <a:r>
+              <a:rPr lang="en-US" sz="2800" dirty="0">
+                <a:solidFill>
+                  <a:srgbClr val="4A6CF7"/>
+                </a:solidFill>
+                <a:latin typeface="Arial Black" pitchFamily="34" charset="0"/>
+                <a:ea typeface="Arial Black" pitchFamily="34" charset="-122"/>
+                <a:cs typeface="Arial Black" pitchFamily="34" charset="-120"/>
+              </a:rPr>
+              <a:t>99 passed</a:t>
+            </a:r>
+            <a:endParaRPr lang="en-US" sz="2800" dirty="0"/>
+          </a:p>
+        </p:txBody>
+      </p:sp>
+      <p:sp>
+        <p:nvSpPr>
+          <p:cNvPr id="11" name="Text 9"/>
+          <p:cNvSpPr/>
+          <p:nvPr/>
+        </p:nvSpPr>
+        <p:spPr>
+          <a:xfrm>
+            <a:off x="6400800" y="1737360"/>
+            <a:ext cx="2560320" cy="365760"/>
+          </a:xfrm>
+          <a:prstGeom prst="rect">
+            <a:avLst/>
+          </a:prstGeom>
+          <a:noFill/>
+          <a:ln/>
+        </p:spPr>
+        <p:txBody>
+          <a:bodyPr wrap="square" lIns="0" tIns="0" rIns="0" bIns="0" rtlCol="0" anchor="ctr"/>
+          <a:lstStyle/>
+          <a:p>
+            <a:pPr algn="ctr" indent="0" marL="0">
+              <a:buNone/>
+            </a:pPr>
+            <a:r>
+              <a:rPr lang="en-US" sz="1400" dirty="0">
+                <a:solidFill>
+                  <a:srgbClr val="CADCFC"/>
+                </a:solidFill>
+                <a:latin typeface="Calibri" pitchFamily="34" charset="0"/>
+                <a:ea typeface="Calibri" pitchFamily="34" charset="-122"/>
+                <a:cs typeface="Calibri" pitchFamily="34" charset="-120"/>
+              </a:rPr>
+              <a:t>테스트</a:t>
+            </a:r>
+            <a:endParaRPr lang="en-US" sz="1400" dirty="0"/>
+          </a:p>
+        </p:txBody>
+      </p:sp>
+      <p:sp>
+        <p:nvSpPr>
+          <p:cNvPr id="12" name="Shape 10"/>
+          <p:cNvSpPr/>
+          <p:nvPr/>
+        </p:nvSpPr>
+        <p:spPr>
+          <a:xfrm>
+            <a:off x="731520" y="2377440"/>
+            <a:ext cx="2560320" cy="1097280"/>
+          </a:xfrm>
+          <a:prstGeom prst="roundRect">
+            <a:avLst>
+              <a:gd name="adj" fmla="val 8333"/>
+            </a:avLst>
+          </a:prstGeom>
+          <a:solidFill>
+            <a:srgbClr val="16213E"/>
+          </a:solidFill>
+          <a:ln/>
+        </p:spPr>
+      </p:sp>
+      <p:sp>
+        <p:nvSpPr>
+          <p:cNvPr id="13" name="Text 11"/>
+          <p:cNvSpPr/>
+          <p:nvPr/>
+        </p:nvSpPr>
+        <p:spPr>
+          <a:xfrm>
+            <a:off x="731520" y="2468880"/>
+            <a:ext cx="2560320" cy="548640"/>
+          </a:xfrm>
+          <a:prstGeom prst="rect">
+            <a:avLst/>
+          </a:prstGeom>
+          <a:noFill/>
+          <a:ln/>
+        </p:spPr>
+        <p:txBody>
+          <a:bodyPr wrap="square" lIns="0" tIns="0" rIns="0" bIns="0" rtlCol="0" anchor="ctr"/>
+          <a:lstStyle/>
+          <a:p>
+            <a:pPr algn="ctr" indent="0" marL="0">
+              <a:buNone/>
+            </a:pPr>
+            <a:r>
+              <a:rPr lang="en-US" sz="2800" dirty="0">
+                <a:solidFill>
+                  <a:srgbClr val="4A6CF7"/>
+                </a:solidFill>
+                <a:latin typeface="Arial Black" pitchFamily="34" charset="0"/>
+                <a:ea typeface="Arial Black" pitchFamily="34" charset="-122"/>
+                <a:cs typeface="Arial Black" pitchFamily="34" charset="-120"/>
+              </a:rPr>
+              <a:t>47개</a:t>
+            </a:r>
+            <a:endParaRPr lang="en-US" sz="2800" dirty="0"/>
+          </a:p>
+        </p:txBody>
+      </p:sp>
+      <p:sp>
+        <p:nvSpPr>
+          <p:cNvPr id="14" name="Text 12"/>
+          <p:cNvSpPr/>
+          <p:nvPr/>
+        </p:nvSpPr>
+        <p:spPr>
+          <a:xfrm>
+            <a:off x="731520" y="3017520"/>
+            <a:ext cx="2560320" cy="365760"/>
+          </a:xfrm>
+          <a:prstGeom prst="rect">
+            <a:avLst/>
+          </a:prstGeom>
+          <a:noFill/>
+          <a:ln/>
+        </p:spPr>
+        <p:txBody>
+          <a:bodyPr wrap="square" lIns="0" tIns="0" rIns="0" bIns="0" rtlCol="0" anchor="ctr"/>
+          <a:lstStyle/>
+          <a:p>
+            <a:pPr algn="ctr" indent="0" marL="0">
+              <a:buNone/>
+            </a:pPr>
+            <a:r>
+              <a:rPr lang="en-US" sz="1400" dirty="0">
+                <a:solidFill>
+                  <a:srgbClr val="CADCFC"/>
+                </a:solidFill>
+                <a:latin typeface="Calibri" pitchFamily="34" charset="0"/>
+                <a:ea typeface="Calibri" pitchFamily="34" charset="-122"/>
+                <a:cs typeface="Calibri" pitchFamily="34" charset="-120"/>
+              </a:rPr>
+              <a:t>MCP 도구</a:t>
+            </a:r>
+            <a:endParaRPr lang="en-US" sz="1400" dirty="0"/>
+          </a:p>
+        </p:txBody>
+      </p:sp>
+      <p:sp>
+        <p:nvSpPr>
+          <p:cNvPr id="15" name="Shape 13"/>
+          <p:cNvSpPr/>
+          <p:nvPr/>
+        </p:nvSpPr>
+        <p:spPr>
+          <a:xfrm>
+            <a:off x="3566160" y="2377440"/>
+            <a:ext cx="2560320" cy="1097280"/>
+          </a:xfrm>
+          <a:prstGeom prst="roundRect">
+            <a:avLst>
+              <a:gd name="adj" fmla="val 8333"/>
+            </a:avLst>
+          </a:prstGeom>
+          <a:solidFill>
+            <a:srgbClr val="16213E"/>
+          </a:solidFill>
+          <a:ln/>
+        </p:spPr>
+      </p:sp>
+      <p:sp>
+        <p:nvSpPr>
+          <p:cNvPr id="16" name="Text 14"/>
+          <p:cNvSpPr/>
+          <p:nvPr/>
+        </p:nvSpPr>
+        <p:spPr>
+          <a:xfrm>
+            <a:off x="3566160" y="2468880"/>
+            <a:ext cx="2560320" cy="548640"/>
+          </a:xfrm>
+          <a:prstGeom prst="rect">
+            <a:avLst/>
+          </a:prstGeom>
+          <a:noFill/>
+          <a:ln/>
+        </p:spPr>
+        <p:txBody>
+          <a:bodyPr wrap="square" lIns="0" tIns="0" rIns="0" bIns="0" rtlCol="0" anchor="ctr"/>
+          <a:lstStyle/>
+          <a:p>
+            <a:pPr algn="ctr" indent="0" marL="0">
+              <a:buNone/>
+            </a:pPr>
+            <a:r>
+              <a:rPr lang="en-US" sz="2800" dirty="0">
+                <a:solidFill>
+                  <a:srgbClr val="4A6CF7"/>
+                </a:solidFill>
+                <a:latin typeface="Arial Black" pitchFamily="34" charset="0"/>
+                <a:ea typeface="Arial Black" pitchFamily="34" charset="-122"/>
+                <a:cs typeface="Arial Black" pitchFamily="34" charset="-120"/>
+              </a:rPr>
+              <a:t>12종</a:t>
+            </a:r>
+            <a:endParaRPr lang="en-US" sz="2800" dirty="0"/>
+          </a:p>
+        </p:txBody>
+      </p:sp>
+      <p:sp>
+        <p:nvSpPr>
+          <p:cNvPr id="17" name="Text 15"/>
+          <p:cNvSpPr/>
+          <p:nvPr/>
+        </p:nvSpPr>
+        <p:spPr>
+          <a:xfrm>
+            <a:off x="3566160" y="3017520"/>
+            <a:ext cx="2560320" cy="365760"/>
+          </a:xfrm>
+          <a:prstGeom prst="rect">
+            <a:avLst/>
+          </a:prstGeom>
+          <a:noFill/>
+          <a:ln/>
+        </p:spPr>
+        <p:txBody>
+          <a:bodyPr wrap="square" lIns="0" tIns="0" rIns="0" bIns="0" rtlCol="0" anchor="ctr"/>
+          <a:lstStyle/>
+          <a:p>
+            <a:pPr algn="ctr" indent="0" marL="0">
+              <a:buNone/>
+            </a:pPr>
+            <a:r>
+              <a:rPr lang="en-US" sz="1400" dirty="0">
+                <a:solidFill>
+                  <a:srgbClr val="CADCFC"/>
+                </a:solidFill>
+                <a:latin typeface="Calibri" pitchFamily="34" charset="0"/>
+                <a:ea typeface="Calibri" pitchFamily="34" charset="-122"/>
+                <a:cs typeface="Calibri" pitchFamily="34" charset="-120"/>
+              </a:rPr>
+              <a:t>GPU 지원</a:t>
+            </a:r>
+            <a:endParaRPr lang="en-US" sz="1400" dirty="0"/>
+          </a:p>
+        </p:txBody>
+      </p:sp>
+      <p:sp>
+        <p:nvSpPr>
+          <p:cNvPr id="18" name="Shape 16"/>
+          <p:cNvSpPr/>
+          <p:nvPr/>
+        </p:nvSpPr>
+        <p:spPr>
+          <a:xfrm>
+            <a:off x="6400800" y="2377440"/>
+            <a:ext cx="2560320" cy="1097280"/>
+          </a:xfrm>
+          <a:prstGeom prst="roundRect">
+            <a:avLst>
+              <a:gd name="adj" fmla="val 8333"/>
+            </a:avLst>
+          </a:prstGeom>
+          <a:solidFill>
+            <a:srgbClr val="16213E"/>
+          </a:solidFill>
+          <a:ln/>
+        </p:spPr>
+      </p:sp>
+      <p:sp>
+        <p:nvSpPr>
+          <p:cNvPr id="19" name="Text 17"/>
+          <p:cNvSpPr/>
+          <p:nvPr/>
+        </p:nvSpPr>
+        <p:spPr>
+          <a:xfrm>
+            <a:off x="6400800" y="2468880"/>
+            <a:ext cx="2560320" cy="548640"/>
+          </a:xfrm>
+          <a:prstGeom prst="rect">
+            <a:avLst/>
+          </a:prstGeom>
+          <a:noFill/>
+          <a:ln/>
+        </p:spPr>
+        <p:txBody>
+          <a:bodyPr wrap="square" lIns="0" tIns="0" rIns="0" bIns="0" rtlCol="0" anchor="ctr"/>
+          <a:lstStyle/>
+          <a:p>
+            <a:pPr algn="ctr" indent="0" marL="0">
+              <a:buNone/>
+            </a:pPr>
+            <a:r>
+              <a:rPr lang="en-US" sz="2800" dirty="0">
+                <a:solidFill>
+                  <a:srgbClr val="4A6CF7"/>
+                </a:solidFill>
+                <a:latin typeface="Arial Black" pitchFamily="34" charset="0"/>
+                <a:ea typeface="Arial Black" pitchFamily="34" charset="-122"/>
+                <a:cs typeface="Arial Black" pitchFamily="34" charset="-120"/>
+              </a:rPr>
+              <a:t>4종</a:t>
+            </a:r>
+            <a:endParaRPr lang="en-US" sz="2800" dirty="0"/>
+          </a:p>
+        </p:txBody>
+      </p:sp>
+      <p:sp>
+        <p:nvSpPr>
+          <p:cNvPr id="20" name="Text 18"/>
+          <p:cNvSpPr/>
+          <p:nvPr/>
+        </p:nvSpPr>
+        <p:spPr>
+          <a:xfrm>
+            <a:off x="6400800" y="3017520"/>
+            <a:ext cx="2560320" cy="365760"/>
+          </a:xfrm>
+          <a:prstGeom prst="rect">
+            <a:avLst/>
+          </a:prstGeom>
+          <a:noFill/>
+          <a:ln/>
+        </p:spPr>
+        <p:txBody>
+          <a:bodyPr wrap="square" lIns="0" tIns="0" rIns="0" bIns="0" rtlCol="0" anchor="ctr"/>
+          <a:lstStyle/>
+          <a:p>
+            <a:pPr algn="ctr" indent="0" marL="0">
+              <a:buNone/>
+            </a:pPr>
+            <a:r>
+              <a:rPr lang="en-US" sz="1400" dirty="0">
+                <a:solidFill>
+                  <a:srgbClr val="CADCFC"/>
+                </a:solidFill>
+                <a:latin typeface="Calibri" pitchFamily="34" charset="0"/>
+                <a:ea typeface="Calibri" pitchFamily="34" charset="-122"/>
+                <a:cs typeface="Calibri" pitchFamily="34" charset="-120"/>
+              </a:rPr>
+              <a:t>배포 환경</a:t>
+            </a:r>
+            <a:endParaRPr lang="en-US" sz="1400" dirty="0"/>
+          </a:p>
+        </p:txBody>
+      </p:sp>
+      <p:sp>
+        <p:nvSpPr>
+          <p:cNvPr id="21" name="Shape 19"/>
+          <p:cNvSpPr/>
+          <p:nvPr/>
+        </p:nvSpPr>
+        <p:spPr>
+          <a:xfrm>
+            <a:off x="731520" y="3840480"/>
+            <a:ext cx="7680960" cy="914400"/>
+          </a:xfrm>
+          <a:prstGeom prst="roundRect">
+            <a:avLst>
+              <a:gd name="adj" fmla="val 10000"/>
+            </a:avLst>
+          </a:prstGeom>
+          <a:solidFill>
+            <a:srgbClr val="16213E"/>
+          </a:solidFill>
+          <a:ln/>
+        </p:spPr>
+      </p:sp>
+      <p:sp>
+        <p:nvSpPr>
+          <p:cNvPr id="22" name="Text 20"/>
+          <p:cNvSpPr/>
+          <p:nvPr/>
+        </p:nvSpPr>
+        <p:spPr>
+          <a:xfrm>
+            <a:off x="914400" y="3931920"/>
+            <a:ext cx="7315200" cy="731520"/>
+          </a:xfrm>
+          <a:prstGeom prst="rect">
+            <a:avLst/>
+          </a:prstGeom>
+          <a:noFill/>
+          <a:ln/>
+        </p:spPr>
+        <p:txBody>
+          <a:bodyPr wrap="square" rtlCol="0" anchor="ctr"/>
+          <a:lstStyle/>
+          <a:p>
+            <a:pPr algn="ctr" indent="0" marL="0">
+              <a:buNone/>
+            </a:pPr>
+            <a:r>
+              <a:rPr lang="en-US" sz="1400" dirty="0">
+                <a:solidFill>
+                  <a:srgbClr val="CADCFC"/>
+                </a:solidFill>
+                <a:latin typeface="Calibri" pitchFamily="34" charset="0"/>
+                <a:ea typeface="Calibri" pitchFamily="34" charset="-122"/>
+                <a:cs typeface="Calibri" pitchFamily="34" charset="-120"/>
+              </a:rPr>
+              <a:t>웹 데모    </a:t>
+            </a:r>
+            <a:pPr algn="ctr" indent="0" marL="0">
+              <a:buNone/>
+            </a:pPr>
+            <a:r>
+              <a:rPr lang="en-US" sz="1400" b="1" dirty="0">
+                <a:solidFill>
+                  <a:srgbClr val="4A6CF7"/>
+                </a:solidFill>
+                <a:latin typeface="Calibri" pitchFamily="34" charset="0"/>
+                <a:ea typeface="Calibri" pitchFamily="34" charset="-122"/>
+                <a:cs typeface="Calibri" pitchFamily="34" charset="-120"/>
+              </a:rPr>
+              <a:t>https://nara-ai-project.vercel.app</a:t>
+            </a:r>
+            <a:endParaRPr lang="en-US" sz="1400" dirty="0"/>
+          </a:p>
+          <a:p>
+            <a:pPr algn="ctr" indent="0" marL="0">
+              <a:buNone/>
+            </a:pPr>
+            <a:r>
+              <a:rPr lang="en-US" sz="1400" dirty="0">
+                <a:solidFill>
+                  <a:srgbClr val="CADCFC"/>
+                </a:solidFill>
+                <a:latin typeface="Calibri" pitchFamily="34" charset="0"/>
+                <a:ea typeface="Calibri" pitchFamily="34" charset="-122"/>
+                <a:cs typeface="Calibri" pitchFamily="34" charset="-120"/>
+              </a:rPr>
+              <a:t>GitHub     </a:t>
+            </a:r>
+            <a:pPr algn="ctr" indent="0" marL="0">
+              <a:buNone/>
+            </a:pPr>
+            <a:r>
+              <a:rPr lang="en-US" sz="1400" b="1" dirty="0">
+                <a:solidFill>
+                  <a:srgbClr val="4A6CF7"/>
+                </a:solidFill>
+                <a:latin typeface="Calibri" pitchFamily="34" charset="0"/>
+                <a:ea typeface="Calibri" pitchFamily="34" charset="-122"/>
+                <a:cs typeface="Calibri" pitchFamily="34" charset="-120"/>
+              </a:rPr>
+              <a:t>github.com/changgi/nara-ai-project</a:t>
+            </a:r>
+            <a:endParaRPr lang="en-US" sz="1400" dirty="0"/>
+          </a:p>
+        </p:txBody>
+      </p:sp>
+    </p:spTree>
+  </p:cSld>
+  <p:clrMapOvr>
+    <a:masterClrMapping/>
+  </p:clrMapOvr>
+</p:sld>
+</file>
+
 <file path=ppt/slides/slide2.xml><?xml version="1.0" encoding="utf-8"?>
 <p:sld xmlns:a="http://schemas.openxmlformats.org/drawingml/2006/main" xmlns:r="http://schemas.openxmlformats.org/officeDocument/2006/relationships" xmlns:p="http://schemas.openxmlformats.org/presentationml/2006/main">
   <p:cSld name="Slide 2">
@@ -7265,6 +10059,780 @@
               <a:t>웹 데모:  https://nara-ai-project.vercel.app   |   GitHub:  github.com/changgi/nara-ai-project</a:t>
             </a:r>
             <a:endParaRPr lang="en-US" sz="1400" dirty="0"/>
+          </a:p>
+        </p:txBody>
+      </p:sp>
+    </p:spTree>
+  </p:cSld>
+  <p:clrMapOvr>
+    <a:masterClrMapping/>
+  </p:clrMapOvr>
+</p:sld>
+</file>
+
+<file path=ppt/slides/slide9.xml><?xml version="1.0" encoding="utf-8"?>
+<p:sld xmlns:a="http://schemas.openxmlformats.org/drawingml/2006/main" xmlns:r="http://schemas.openxmlformats.org/officeDocument/2006/relationships" xmlns:p="http://schemas.openxmlformats.org/presentationml/2006/main">
+  <p:cSld name="Slide 9">
+    <p:bg>
+      <p:bgPr>
+        <a:solidFill>
+          <a:srgbClr val="F5F7FA"/>
+        </a:solidFill>
+      </p:bgPr>
+    </p:bg>
+    <p:spTree>
+      <p:nvGrpSpPr>
+        <p:cNvPr id="1" name=""/>
+        <p:cNvGrpSpPr/>
+        <p:nvPr/>
+      </p:nvGrpSpPr>
+      <p:grpSpPr>
+        <a:xfrm>
+          <a:off x="0" y="0"/>
+          <a:ext cx="0" cy="0"/>
+          <a:chOff x="0" y="0"/>
+          <a:chExt cx="0" cy="0"/>
+        </a:xfrm>
+      </p:grpSpPr>
+      <p:sp>
+        <p:nvSpPr>
+          <p:cNvPr id="2" name="Text 0"/>
+          <p:cNvSpPr/>
+          <p:nvPr/>
+        </p:nvSpPr>
+        <p:spPr>
+          <a:xfrm>
+            <a:off x="731520" y="274320"/>
+            <a:ext cx="7680960" cy="640080"/>
+          </a:xfrm>
+          <a:prstGeom prst="rect">
+            <a:avLst/>
+          </a:prstGeom>
+          <a:noFill/>
+          <a:ln/>
+        </p:spPr>
+        <p:txBody>
+          <a:bodyPr wrap="square" rtlCol="0" anchor="ctr"/>
+          <a:lstStyle/>
+          <a:p>
+            <a:pPr indent="0" marL="0">
+              <a:buNone/>
+            </a:pPr>
+            <a:r>
+              <a:rPr lang="en-US" sz="3600" dirty="0">
+                <a:solidFill>
+                  <a:srgbClr val="1A1A2E"/>
+                </a:solidFill>
+                <a:latin typeface="Arial Black" pitchFamily="34" charset="0"/>
+                <a:ea typeface="Arial Black" pitchFamily="34" charset="-122"/>
+                <a:cs typeface="Arial Black" pitchFamily="34" charset="-120"/>
+              </a:rPr>
+              <a:t>유니버설 배포 아키텍처</a:t>
+            </a:r>
+            <a:endParaRPr lang="en-US" sz="3600" dirty="0"/>
+          </a:p>
+        </p:txBody>
+      </p:sp>
+      <p:sp>
+        <p:nvSpPr>
+          <p:cNvPr id="3" name="Text 1"/>
+          <p:cNvSpPr/>
+          <p:nvPr/>
+        </p:nvSpPr>
+        <p:spPr>
+          <a:xfrm>
+            <a:off x="731520" y="822960"/>
+            <a:ext cx="7680960" cy="365760"/>
+          </a:xfrm>
+          <a:prstGeom prst="rect">
+            <a:avLst/>
+          </a:prstGeom>
+          <a:noFill/>
+          <a:ln/>
+        </p:spPr>
+        <p:txBody>
+          <a:bodyPr wrap="square" rtlCol="0" anchor="ctr"/>
+          <a:lstStyle/>
+          <a:p>
+            <a:pPr indent="0" marL="0">
+              <a:buNone/>
+            </a:pPr>
+            <a:r>
+              <a:rPr lang="en-US" sz="1400" dirty="0">
+                <a:solidFill>
+                  <a:srgbClr val="888888"/>
+                </a:solidFill>
+                <a:latin typeface="Calibri" pitchFamily="34" charset="0"/>
+                <a:ea typeface="Calibri" pitchFamily="34" charset="-122"/>
+                <a:cs typeface="Calibri" pitchFamily="34" charset="-120"/>
+              </a:rPr>
+              <a:t>하나의 코드 (api/app.py) → 4개 환경에서 동일하게 동작</a:t>
+            </a:r>
+            <a:endParaRPr lang="en-US" sz="1400" dirty="0"/>
+          </a:p>
+        </p:txBody>
+      </p:sp>
+      <p:sp>
+        <p:nvSpPr>
+          <p:cNvPr id="4" name="Shape 2"/>
+          <p:cNvSpPr/>
+          <p:nvPr/>
+        </p:nvSpPr>
+        <p:spPr>
+          <a:xfrm>
+            <a:off x="731520" y="1371600"/>
+            <a:ext cx="7680960" cy="777240"/>
+          </a:xfrm>
+          <a:prstGeom prst="roundRect">
+            <a:avLst>
+              <a:gd name="adj" fmla="val 11765"/>
+            </a:avLst>
+          </a:prstGeom>
+          <a:solidFill>
+            <a:srgbClr val="FFFFFF"/>
+          </a:solidFill>
+          <a:ln/>
+          <a:effectLst>
+            <a:outerShdw sx="100000" sy="100000" kx="0" ky="0" algn="bl" rotWithShape="0" blurRad="38100" dist="12700" dir="8100000">
+              <a:srgbClr val="000000">
+                <a:alpha val="6000"/>
+              </a:srgbClr>
+            </a:outerShdw>
+          </a:effectLst>
+        </p:spPr>
+      </p:sp>
+      <p:sp>
+        <p:nvSpPr>
+          <p:cNvPr id="5" name="Shape 3"/>
+          <p:cNvSpPr/>
+          <p:nvPr/>
+        </p:nvSpPr>
+        <p:spPr>
+          <a:xfrm>
+            <a:off x="731520" y="1371600"/>
+            <a:ext cx="137160" cy="777240"/>
+          </a:xfrm>
+          <a:prstGeom prst="rect">
+            <a:avLst/>
+          </a:prstGeom>
+          <a:solidFill>
+            <a:srgbClr val="2196F3"/>
+          </a:solidFill>
+          <a:ln/>
+        </p:spPr>
+      </p:sp>
+      <p:sp>
+        <p:nvSpPr>
+          <p:cNvPr id="6" name="Text 4"/>
+          <p:cNvSpPr/>
+          <p:nvPr/>
+        </p:nvSpPr>
+        <p:spPr>
+          <a:xfrm>
+            <a:off x="1097280" y="1417320"/>
+            <a:ext cx="2560320" cy="320040"/>
+          </a:xfrm>
+          <a:prstGeom prst="rect">
+            <a:avLst/>
+          </a:prstGeom>
+          <a:noFill/>
+          <a:ln/>
+        </p:spPr>
+        <p:txBody>
+          <a:bodyPr wrap="square" lIns="0" tIns="0" rIns="0" bIns="0" rtlCol="0" anchor="ctr"/>
+          <a:lstStyle/>
+          <a:p>
+            <a:pPr indent="0" marL="0">
+              <a:buNone/>
+            </a:pPr>
+            <a:r>
+              <a:rPr lang="en-US" sz="1400" b="1" dirty="0">
+                <a:solidFill>
+                  <a:srgbClr val="1A1A2E"/>
+                </a:solidFill>
+                <a:latin typeface="Calibri" pitchFamily="34" charset="0"/>
+                <a:ea typeface="Calibri" pitchFamily="34" charset="-122"/>
+                <a:cs typeface="Calibri" pitchFamily="34" charset="-120"/>
+              </a:rPr>
+              <a:t>로컬 (Windows/Linux/macOS)</a:t>
+            </a:r>
+            <a:endParaRPr lang="en-US" sz="1400" dirty="0"/>
+          </a:p>
+        </p:txBody>
+      </p:sp>
+      <p:sp>
+        <p:nvSpPr>
+          <p:cNvPr id="7" name="Text 5"/>
+          <p:cNvSpPr/>
+          <p:nvPr/>
+        </p:nvSpPr>
+        <p:spPr>
+          <a:xfrm>
+            <a:off x="1097280" y="1737360"/>
+            <a:ext cx="2560320" cy="320040"/>
+          </a:xfrm>
+          <a:prstGeom prst="rect">
+            <a:avLst/>
+          </a:prstGeom>
+          <a:noFill/>
+          <a:ln/>
+        </p:spPr>
+        <p:txBody>
+          <a:bodyPr wrap="square" lIns="0" tIns="0" rIns="0" bIns="0" rtlCol="0" anchor="ctr"/>
+          <a:lstStyle/>
+          <a:p>
+            <a:pPr indent="0" marL="0">
+              <a:buNone/>
+            </a:pPr>
+            <a:r>
+              <a:rPr lang="en-US" sz="1100" dirty="0">
+                <a:solidFill>
+                  <a:srgbClr val="888888"/>
+                </a:solidFill>
+                <a:latin typeface="Consolas" pitchFamily="34" charset="0"/>
+                <a:ea typeface="Consolas" pitchFamily="34" charset="-122"/>
+                <a:cs typeface="Consolas" pitchFamily="34" charset="-120"/>
+              </a:rPr>
+              <a:t>python -m uvicorn api.app:app</a:t>
+            </a:r>
+            <a:endParaRPr lang="en-US" sz="1100" dirty="0"/>
+          </a:p>
+        </p:txBody>
+      </p:sp>
+      <p:sp>
+        <p:nvSpPr>
+          <p:cNvPr id="8" name="Text 6"/>
+          <p:cNvSpPr/>
+          <p:nvPr/>
+        </p:nvSpPr>
+        <p:spPr>
+          <a:xfrm>
+            <a:off x="5943600" y="1371600"/>
+            <a:ext cx="2286000" cy="777240"/>
+          </a:xfrm>
+          <a:prstGeom prst="rect">
+            <a:avLst/>
+          </a:prstGeom>
+          <a:noFill/>
+          <a:ln/>
+        </p:spPr>
+        <p:txBody>
+          <a:bodyPr wrap="square" lIns="0" tIns="0" rIns="0" bIns="0" rtlCol="0" anchor="ctr"/>
+          <a:lstStyle/>
+          <a:p>
+            <a:pPr indent="0" marL="0">
+              <a:buNone/>
+            </a:pPr>
+            <a:r>
+              <a:rPr lang="en-US" sz="1200" dirty="0">
+                <a:solidFill>
+                  <a:srgbClr val="4A6CF7"/>
+                </a:solidFill>
+                <a:latin typeface="Calibri" pitchFamily="34" charset="0"/>
+                <a:ea typeface="Calibri" pitchFamily="34" charset="-122"/>
+                <a:cs typeface="Calibri" pitchFamily="34" charset="-120"/>
+              </a:rPr>
+              <a:t>CPU 검색 (TF-IDF+BM25)</a:t>
+            </a:r>
+            <a:endParaRPr lang="en-US" sz="1200" dirty="0"/>
+          </a:p>
+        </p:txBody>
+      </p:sp>
+      <p:sp>
+        <p:nvSpPr>
+          <p:cNvPr id="9" name="Shape 7"/>
+          <p:cNvSpPr/>
+          <p:nvPr/>
+        </p:nvSpPr>
+        <p:spPr>
+          <a:xfrm>
+            <a:off x="731520" y="2240280"/>
+            <a:ext cx="7680960" cy="777240"/>
+          </a:xfrm>
+          <a:prstGeom prst="roundRect">
+            <a:avLst>
+              <a:gd name="adj" fmla="val 11765"/>
+            </a:avLst>
+          </a:prstGeom>
+          <a:solidFill>
+            <a:srgbClr val="FFFFFF"/>
+          </a:solidFill>
+          <a:ln/>
+          <a:effectLst>
+            <a:outerShdw sx="100000" sy="100000" kx="0" ky="0" algn="bl" rotWithShape="0" blurRad="38100" dist="12700" dir="8100000">
+              <a:srgbClr val="000000">
+                <a:alpha val="6000"/>
+              </a:srgbClr>
+            </a:outerShdw>
+          </a:effectLst>
+        </p:spPr>
+      </p:sp>
+      <p:sp>
+        <p:nvSpPr>
+          <p:cNvPr id="10" name="Shape 8"/>
+          <p:cNvSpPr/>
+          <p:nvPr/>
+        </p:nvSpPr>
+        <p:spPr>
+          <a:xfrm>
+            <a:off x="731520" y="2240280"/>
+            <a:ext cx="137160" cy="777240"/>
+          </a:xfrm>
+          <a:prstGeom prst="rect">
+            <a:avLst/>
+          </a:prstGeom>
+          <a:solidFill>
+            <a:srgbClr val="000000"/>
+          </a:solidFill>
+          <a:ln/>
+        </p:spPr>
+      </p:sp>
+      <p:sp>
+        <p:nvSpPr>
+          <p:cNvPr id="11" name="Text 9"/>
+          <p:cNvSpPr/>
+          <p:nvPr/>
+        </p:nvSpPr>
+        <p:spPr>
+          <a:xfrm>
+            <a:off x="1097280" y="2286000"/>
+            <a:ext cx="2560320" cy="320040"/>
+          </a:xfrm>
+          <a:prstGeom prst="rect">
+            <a:avLst/>
+          </a:prstGeom>
+          <a:noFill/>
+          <a:ln/>
+        </p:spPr>
+        <p:txBody>
+          <a:bodyPr wrap="square" lIns="0" tIns="0" rIns="0" bIns="0" rtlCol="0" anchor="ctr"/>
+          <a:lstStyle/>
+          <a:p>
+            <a:pPr indent="0" marL="0">
+              <a:buNone/>
+            </a:pPr>
+            <a:r>
+              <a:rPr lang="en-US" sz="1400" b="1" dirty="0">
+                <a:solidFill>
+                  <a:srgbClr val="1A1A2E"/>
+                </a:solidFill>
+                <a:latin typeface="Calibri" pitchFamily="34" charset="0"/>
+                <a:ea typeface="Calibri" pitchFamily="34" charset="-122"/>
+                <a:cs typeface="Calibri" pitchFamily="34" charset="-120"/>
+              </a:rPr>
+              <a:t>Vercel (클라우드)</a:t>
+            </a:r>
+            <a:endParaRPr lang="en-US" sz="1400" dirty="0"/>
+          </a:p>
+        </p:txBody>
+      </p:sp>
+      <p:sp>
+        <p:nvSpPr>
+          <p:cNvPr id="12" name="Text 10"/>
+          <p:cNvSpPr/>
+          <p:nvPr/>
+        </p:nvSpPr>
+        <p:spPr>
+          <a:xfrm>
+            <a:off x="1097280" y="2606040"/>
+            <a:ext cx="2560320" cy="320040"/>
+          </a:xfrm>
+          <a:prstGeom prst="rect">
+            <a:avLst/>
+          </a:prstGeom>
+          <a:noFill/>
+          <a:ln/>
+        </p:spPr>
+        <p:txBody>
+          <a:bodyPr wrap="square" lIns="0" tIns="0" rIns="0" bIns="0" rtlCol="0" anchor="ctr"/>
+          <a:lstStyle/>
+          <a:p>
+            <a:pPr indent="0" marL="0">
+              <a:buNone/>
+            </a:pPr>
+            <a:r>
+              <a:rPr lang="en-US" sz="1100" dirty="0">
+                <a:solidFill>
+                  <a:srgbClr val="888888"/>
+                </a:solidFill>
+                <a:latin typeface="Consolas" pitchFamily="34" charset="0"/>
+                <a:ea typeface="Consolas" pitchFamily="34" charset="-122"/>
+                <a:cs typeface="Consolas" pitchFamily="34" charset="-120"/>
+              </a:rPr>
+              <a:t>vercel deploy --prod</a:t>
+            </a:r>
+            <a:endParaRPr lang="en-US" sz="1100" dirty="0"/>
+          </a:p>
+        </p:txBody>
+      </p:sp>
+      <p:sp>
+        <p:nvSpPr>
+          <p:cNvPr id="13" name="Text 11"/>
+          <p:cNvSpPr/>
+          <p:nvPr/>
+        </p:nvSpPr>
+        <p:spPr>
+          <a:xfrm>
+            <a:off x="5943600" y="2240280"/>
+            <a:ext cx="2286000" cy="777240"/>
+          </a:xfrm>
+          <a:prstGeom prst="rect">
+            <a:avLst/>
+          </a:prstGeom>
+          <a:noFill/>
+          <a:ln/>
+        </p:spPr>
+        <p:txBody>
+          <a:bodyPr wrap="square" lIns="0" tIns="0" rIns="0" bIns="0" rtlCol="0" anchor="ctr"/>
+          <a:lstStyle/>
+          <a:p>
+            <a:pPr indent="0" marL="0">
+              <a:buNone/>
+            </a:pPr>
+            <a:r>
+              <a:rPr lang="en-US" sz="1200" dirty="0">
+                <a:solidFill>
+                  <a:srgbClr val="4A6CF7"/>
+                </a:solidFill>
+                <a:latin typeface="Calibri" pitchFamily="34" charset="0"/>
+                <a:ea typeface="Calibri" pitchFamily="34" charset="-122"/>
+                <a:cs typeface="Calibri" pitchFamily="34" charset="-120"/>
+              </a:rPr>
+              <a:t>Supabase REST 검색</a:t>
+            </a:r>
+            <a:endParaRPr lang="en-US" sz="1200" dirty="0"/>
+          </a:p>
+        </p:txBody>
+      </p:sp>
+      <p:sp>
+        <p:nvSpPr>
+          <p:cNvPr id="14" name="Shape 12"/>
+          <p:cNvSpPr/>
+          <p:nvPr/>
+        </p:nvSpPr>
+        <p:spPr>
+          <a:xfrm>
+            <a:off x="731520" y="3108960"/>
+            <a:ext cx="7680960" cy="777240"/>
+          </a:xfrm>
+          <a:prstGeom prst="roundRect">
+            <a:avLst>
+              <a:gd name="adj" fmla="val 11765"/>
+            </a:avLst>
+          </a:prstGeom>
+          <a:solidFill>
+            <a:srgbClr val="FFFFFF"/>
+          </a:solidFill>
+          <a:ln/>
+          <a:effectLst>
+            <a:outerShdw sx="100000" sy="100000" kx="0" ky="0" algn="bl" rotWithShape="0" blurRad="38100" dist="12700" dir="8100000">
+              <a:srgbClr val="000000">
+                <a:alpha val="6000"/>
+              </a:srgbClr>
+            </a:outerShdw>
+          </a:effectLst>
+        </p:spPr>
+      </p:sp>
+      <p:sp>
+        <p:nvSpPr>
+          <p:cNvPr id="15" name="Shape 13"/>
+          <p:cNvSpPr/>
+          <p:nvPr/>
+        </p:nvSpPr>
+        <p:spPr>
+          <a:xfrm>
+            <a:off x="731520" y="3108960"/>
+            <a:ext cx="137160" cy="777240"/>
+          </a:xfrm>
+          <a:prstGeom prst="rect">
+            <a:avLst/>
+          </a:prstGeom>
+          <a:solidFill>
+            <a:srgbClr val="FF9900"/>
+          </a:solidFill>
+          <a:ln/>
+        </p:spPr>
+      </p:sp>
+      <p:sp>
+        <p:nvSpPr>
+          <p:cNvPr id="16" name="Text 14"/>
+          <p:cNvSpPr/>
+          <p:nvPr/>
+        </p:nvSpPr>
+        <p:spPr>
+          <a:xfrm>
+            <a:off x="1097280" y="3154680"/>
+            <a:ext cx="2560320" cy="320040"/>
+          </a:xfrm>
+          <a:prstGeom prst="rect">
+            <a:avLst/>
+          </a:prstGeom>
+          <a:noFill/>
+          <a:ln/>
+        </p:spPr>
+        <p:txBody>
+          <a:bodyPr wrap="square" lIns="0" tIns="0" rIns="0" bIns="0" rtlCol="0" anchor="ctr"/>
+          <a:lstStyle/>
+          <a:p>
+            <a:pPr indent="0" marL="0">
+              <a:buNone/>
+            </a:pPr>
+            <a:r>
+              <a:rPr lang="en-US" sz="1400" b="1" dirty="0">
+                <a:solidFill>
+                  <a:srgbClr val="1A1A2E"/>
+                </a:solidFill>
+                <a:latin typeface="Calibri" pitchFamily="34" charset="0"/>
+                <a:ea typeface="Calibri" pitchFamily="34" charset="-122"/>
+                <a:cs typeface="Calibri" pitchFamily="34" charset="-120"/>
+              </a:rPr>
+              <a:t>AWS Lambda</a:t>
+            </a:r>
+            <a:endParaRPr lang="en-US" sz="1400" dirty="0"/>
+          </a:p>
+        </p:txBody>
+      </p:sp>
+      <p:sp>
+        <p:nvSpPr>
+          <p:cNvPr id="17" name="Text 15"/>
+          <p:cNvSpPr/>
+          <p:nvPr/>
+        </p:nvSpPr>
+        <p:spPr>
+          <a:xfrm>
+            <a:off x="1097280" y="3474720"/>
+            <a:ext cx="2560320" cy="320040"/>
+          </a:xfrm>
+          <a:prstGeom prst="rect">
+            <a:avLst/>
+          </a:prstGeom>
+          <a:noFill/>
+          <a:ln/>
+        </p:spPr>
+        <p:txBody>
+          <a:bodyPr wrap="square" lIns="0" tIns="0" rIns="0" bIns="0" rtlCol="0" anchor="ctr"/>
+          <a:lstStyle/>
+          <a:p>
+            <a:pPr indent="0" marL="0">
+              <a:buNone/>
+            </a:pPr>
+            <a:r>
+              <a:rPr lang="en-US" sz="1100" dirty="0">
+                <a:solidFill>
+                  <a:srgbClr val="888888"/>
+                </a:solidFill>
+                <a:latin typeface="Consolas" pitchFamily="34" charset="0"/>
+                <a:ea typeface="Consolas" pitchFamily="34" charset="-122"/>
+                <a:cs typeface="Consolas" pitchFamily="34" charset="-120"/>
+              </a:rPr>
+              <a:t>sam deploy (Mangum 어댑터)</a:t>
+            </a:r>
+            <a:endParaRPr lang="en-US" sz="1100" dirty="0"/>
+          </a:p>
+        </p:txBody>
+      </p:sp>
+      <p:sp>
+        <p:nvSpPr>
+          <p:cNvPr id="18" name="Text 16"/>
+          <p:cNvSpPr/>
+          <p:nvPr/>
+        </p:nvSpPr>
+        <p:spPr>
+          <a:xfrm>
+            <a:off x="5943600" y="3108960"/>
+            <a:ext cx="2286000" cy="777240"/>
+          </a:xfrm>
+          <a:prstGeom prst="rect">
+            <a:avLst/>
+          </a:prstGeom>
+          <a:noFill/>
+          <a:ln/>
+        </p:spPr>
+        <p:txBody>
+          <a:bodyPr wrap="square" lIns="0" tIns="0" rIns="0" bIns="0" rtlCol="0" anchor="ctr"/>
+          <a:lstStyle/>
+          <a:p>
+            <a:pPr indent="0" marL="0">
+              <a:buNone/>
+            </a:pPr>
+            <a:r>
+              <a:rPr lang="en-US" sz="1200" dirty="0">
+                <a:solidFill>
+                  <a:srgbClr val="4A6CF7"/>
+                </a:solidFill>
+                <a:latin typeface="Calibri" pitchFamily="34" charset="0"/>
+                <a:ea typeface="Calibri" pitchFamily="34" charset="-122"/>
+                <a:cs typeface="Calibri" pitchFamily="34" charset="-120"/>
+              </a:rPr>
+              <a:t>Supabase / 자동 폴백</a:t>
+            </a:r>
+            <a:endParaRPr lang="en-US" sz="1200" dirty="0"/>
+          </a:p>
+        </p:txBody>
+      </p:sp>
+      <p:sp>
+        <p:nvSpPr>
+          <p:cNvPr id="19" name="Shape 17"/>
+          <p:cNvSpPr/>
+          <p:nvPr/>
+        </p:nvSpPr>
+        <p:spPr>
+          <a:xfrm>
+            <a:off x="731520" y="3977640"/>
+            <a:ext cx="7680960" cy="777240"/>
+          </a:xfrm>
+          <a:prstGeom prst="roundRect">
+            <a:avLst>
+              <a:gd name="adj" fmla="val 11765"/>
+            </a:avLst>
+          </a:prstGeom>
+          <a:solidFill>
+            <a:srgbClr val="FFFFFF"/>
+          </a:solidFill>
+          <a:ln/>
+          <a:effectLst>
+            <a:outerShdw sx="100000" sy="100000" kx="0" ky="0" algn="bl" rotWithShape="0" blurRad="38100" dist="12700" dir="8100000">
+              <a:srgbClr val="000000">
+                <a:alpha val="6000"/>
+              </a:srgbClr>
+            </a:outerShdw>
+          </a:effectLst>
+        </p:spPr>
+      </p:sp>
+      <p:sp>
+        <p:nvSpPr>
+          <p:cNvPr id="20" name="Shape 18"/>
+          <p:cNvSpPr/>
+          <p:nvPr/>
+        </p:nvSpPr>
+        <p:spPr>
+          <a:xfrm>
+            <a:off x="731520" y="3977640"/>
+            <a:ext cx="137160" cy="777240"/>
+          </a:xfrm>
+          <a:prstGeom prst="rect">
+            <a:avLst/>
+          </a:prstGeom>
+          <a:solidFill>
+            <a:srgbClr val="2496ED"/>
+          </a:solidFill>
+          <a:ln/>
+        </p:spPr>
+      </p:sp>
+      <p:sp>
+        <p:nvSpPr>
+          <p:cNvPr id="21" name="Text 19"/>
+          <p:cNvSpPr/>
+          <p:nvPr/>
+        </p:nvSpPr>
+        <p:spPr>
+          <a:xfrm>
+            <a:off x="1097280" y="4023360"/>
+            <a:ext cx="2560320" cy="320040"/>
+          </a:xfrm>
+          <a:prstGeom prst="rect">
+            <a:avLst/>
+          </a:prstGeom>
+          <a:noFill/>
+          <a:ln/>
+        </p:spPr>
+        <p:txBody>
+          <a:bodyPr wrap="square" lIns="0" tIns="0" rIns="0" bIns="0" rtlCol="0" anchor="ctr"/>
+          <a:lstStyle/>
+          <a:p>
+            <a:pPr indent="0" marL="0">
+              <a:buNone/>
+            </a:pPr>
+            <a:r>
+              <a:rPr lang="en-US" sz="1400" b="1" dirty="0">
+                <a:solidFill>
+                  <a:srgbClr val="1A1A2E"/>
+                </a:solidFill>
+                <a:latin typeface="Calibri" pitchFamily="34" charset="0"/>
+                <a:ea typeface="Calibri" pitchFamily="34" charset="-122"/>
+                <a:cs typeface="Calibri" pitchFamily="34" charset="-120"/>
+              </a:rPr>
+              <a:t>Docker 컨테이너</a:t>
+            </a:r>
+            <a:endParaRPr lang="en-US" sz="1400" dirty="0"/>
+          </a:p>
+        </p:txBody>
+      </p:sp>
+      <p:sp>
+        <p:nvSpPr>
+          <p:cNvPr id="22" name="Text 20"/>
+          <p:cNvSpPr/>
+          <p:nvPr/>
+        </p:nvSpPr>
+        <p:spPr>
+          <a:xfrm>
+            <a:off x="1097280" y="4343400"/>
+            <a:ext cx="2560320" cy="320040"/>
+          </a:xfrm>
+          <a:prstGeom prst="rect">
+            <a:avLst/>
+          </a:prstGeom>
+          <a:noFill/>
+          <a:ln/>
+        </p:spPr>
+        <p:txBody>
+          <a:bodyPr wrap="square" lIns="0" tIns="0" rIns="0" bIns="0" rtlCol="0" anchor="ctr"/>
+          <a:lstStyle/>
+          <a:p>
+            <a:pPr indent="0" marL="0">
+              <a:buNone/>
+            </a:pPr>
+            <a:r>
+              <a:rPr lang="en-US" sz="1100" dirty="0">
+                <a:solidFill>
+                  <a:srgbClr val="888888"/>
+                </a:solidFill>
+                <a:latin typeface="Consolas" pitchFamily="34" charset="0"/>
+                <a:ea typeface="Consolas" pitchFamily="34" charset="-122"/>
+                <a:cs typeface="Consolas" pitchFamily="34" charset="-120"/>
+              </a:rPr>
+              <a:t>docker run -p 8080:8080</a:t>
+            </a:r>
+            <a:endParaRPr lang="en-US" sz="1100" dirty="0"/>
+          </a:p>
+        </p:txBody>
+      </p:sp>
+      <p:sp>
+        <p:nvSpPr>
+          <p:cNvPr id="23" name="Text 21"/>
+          <p:cNvSpPr/>
+          <p:nvPr/>
+        </p:nvSpPr>
+        <p:spPr>
+          <a:xfrm>
+            <a:off x="5943600" y="3977640"/>
+            <a:ext cx="2286000" cy="777240"/>
+          </a:xfrm>
+          <a:prstGeom prst="rect">
+            <a:avLst/>
+          </a:prstGeom>
+          <a:noFill/>
+          <a:ln/>
+        </p:spPr>
+        <p:txBody>
+          <a:bodyPr wrap="square" lIns="0" tIns="0" rIns="0" bIns="0" rtlCol="0" anchor="ctr"/>
+          <a:lstStyle/>
+          <a:p>
+            <a:pPr indent="0" marL="0">
+              <a:buNone/>
+            </a:pPr>
+            <a:r>
+              <a:rPr lang="en-US" sz="1200" dirty="0">
+                <a:solidFill>
+                  <a:srgbClr val="4A6CF7"/>
+                </a:solidFill>
+                <a:latin typeface="Calibri" pitchFamily="34" charset="0"/>
+                <a:ea typeface="Calibri" pitchFamily="34" charset="-122"/>
+                <a:cs typeface="Calibri" pitchFamily="34" charset="-120"/>
+              </a:rPr>
+              <a:t>CPU 검색 + src/ 풀 기능</a:t>
+            </a:r>
+            <a:endParaRPr lang="en-US" sz="1200" dirty="0"/>
           </a:p>
         </p:txBody>
       </p:sp>
